--- a/public/PPT sankalp.pptx
+++ b/public/PPT sankalp.pptx
@@ -13,30 +13,29 @@
     <p:sldId id="261" r:id="rId11"/>
     <p:sldId id="262" r:id="rId12"/>
     <p:sldId id="263" r:id="rId13"/>
-    <p:sldId id="264" r:id="rId14"/>
   </p:sldIdLst>
   <p:sldSz cx="18288000" cy="10287000"/>
   <p:notesSz cx="6858000" cy="9144000"/>
   <p:embeddedFontLst>
     <p:embeddedFont>
       <p:font typeface="Gotham Bold" charset="1" panose="00000000000000000000"/>
+      <p:regular r:id="rId14"/>
+    </p:embeddedFont>
+    <p:embeddedFont>
+      <p:font typeface="Lastica" charset="1" panose="02000500000000000000"/>
       <p:regular r:id="rId15"/>
     </p:embeddedFont>
     <p:embeddedFont>
-      <p:font typeface="Lastica" charset="1" panose="02000500000000000000"/>
+      <p:font typeface="Poppins Bold" charset="1" panose="00000800000000000000"/>
       <p:regular r:id="rId16"/>
     </p:embeddedFont>
     <p:embeddedFont>
-      <p:font typeface="Poppins Bold" charset="1" panose="00000800000000000000"/>
+      <p:font typeface="Intro Rust" charset="1" panose="00000500000000000000"/>
       <p:regular r:id="rId17"/>
     </p:embeddedFont>
     <p:embeddedFont>
-      <p:font typeface="Intro Rust" charset="1" panose="00000500000000000000"/>
+      <p:font typeface="Poppins" charset="1" panose="00000500000000000000"/>
       <p:regular r:id="rId18"/>
-    </p:embeddedFont>
-    <p:embeddedFont>
-      <p:font typeface="Poppins" charset="1" panose="00000500000000000000"/>
-      <p:regular r:id="rId19"/>
     </p:embeddedFont>
   </p:embeddedFontLst>
   <p:defaultTextStyle>
@@ -8077,363 +8076,6 @@
 </p:sld>
 </file>
 
-<file path=ppt/slides/slide9.xml><?xml version="1.0" encoding="utf-8"?>
-<p:sld xmlns:p="http://schemas.openxmlformats.org/presentationml/2006/main" xmlns:a="http://schemas.openxmlformats.org/drawingml/2006/main" xmlns:r="http://schemas.openxmlformats.org/officeDocument/2006/relationships">
-  <p:cSld>
-    <p:spTree>
-      <p:nvGrpSpPr>
-        <p:cNvPr id="1" name=""/>
-        <p:cNvGrpSpPr/>
-        <p:nvPr/>
-      </p:nvGrpSpPr>
-      <p:grpSpPr>
-        <a:xfrm>
-          <a:off x="0" y="0"/>
-          <a:ext cx="0" cy="0"/>
-          <a:chOff x="0" y="0"/>
-          <a:chExt cx="0" cy="0"/>
-        </a:xfrm>
-      </p:grpSpPr>
-      <p:grpSp>
-        <p:nvGrpSpPr>
-          <p:cNvPr name="Group 2" id="2"/>
-          <p:cNvGrpSpPr/>
-          <p:nvPr/>
-        </p:nvGrpSpPr>
-        <p:grpSpPr>
-          <a:xfrm rot="0">
-            <a:off x="514757" y="1250053"/>
-            <a:ext cx="17632563" cy="2108721"/>
-            <a:chOff x="0" y="0"/>
-            <a:chExt cx="23510084" cy="2811628"/>
-          </a:xfrm>
-        </p:grpSpPr>
-        <p:sp>
-          <p:nvSpPr>
-            <p:cNvPr name="Freeform 3" id="3"/>
-            <p:cNvSpPr/>
-            <p:nvPr/>
-          </p:nvSpPr>
-          <p:spPr>
-            <a:xfrm flipH="false" flipV="false" rot="0">
-              <a:off x="0" y="0"/>
-              <a:ext cx="23510084" cy="2811628"/>
-            </a:xfrm>
-            <a:custGeom>
-              <a:avLst/>
-              <a:gdLst/>
-              <a:ahLst/>
-              <a:cxnLst/>
-              <a:rect r="r" b="b" t="t" l="l"/>
-              <a:pathLst>
-                <a:path h="2811628" w="23510084">
-                  <a:moveTo>
-                    <a:pt x="0" y="0"/>
-                  </a:moveTo>
-                  <a:lnTo>
-                    <a:pt x="23510084" y="0"/>
-                  </a:lnTo>
-                  <a:lnTo>
-                    <a:pt x="23510084" y="2811628"/>
-                  </a:lnTo>
-                  <a:lnTo>
-                    <a:pt x="0" y="2811628"/>
-                  </a:lnTo>
-                  <a:lnTo>
-                    <a:pt x="0" y="0"/>
-                  </a:lnTo>
-                  <a:close/>
-                </a:path>
-              </a:pathLst>
-            </a:custGeom>
-            <a:blipFill>
-              <a:blip r:embed="rId2"/>
-              <a:stretch>
-                <a:fillRect l="0" t="-224546" r="-6376" b="-479332"/>
-              </a:stretch>
-            </a:blipFill>
-          </p:spPr>
-        </p:sp>
-        <p:sp>
-          <p:nvSpPr>
-            <p:cNvPr name="Freeform 4" id="4"/>
-            <p:cNvSpPr/>
-            <p:nvPr/>
-          </p:nvSpPr>
-          <p:spPr>
-            <a:xfrm flipH="false" flipV="false" rot="0">
-              <a:off x="6422315" y="292223"/>
-              <a:ext cx="11382637" cy="1537309"/>
-            </a:xfrm>
-            <a:custGeom>
-              <a:avLst/>
-              <a:gdLst/>
-              <a:ahLst/>
-              <a:cxnLst/>
-              <a:rect r="r" b="b" t="t" l="l"/>
-              <a:pathLst>
-                <a:path h="1537309" w="11382637">
-                  <a:moveTo>
-                    <a:pt x="0" y="0"/>
-                  </a:moveTo>
-                  <a:lnTo>
-                    <a:pt x="11382637" y="0"/>
-                  </a:lnTo>
-                  <a:lnTo>
-                    <a:pt x="11382637" y="1537309"/>
-                  </a:lnTo>
-                  <a:lnTo>
-                    <a:pt x="0" y="1537309"/>
-                  </a:lnTo>
-                  <a:lnTo>
-                    <a:pt x="0" y="0"/>
-                  </a:lnTo>
-                  <a:close/>
-                </a:path>
-              </a:pathLst>
-            </a:custGeom>
-            <a:blipFill>
-              <a:blip r:embed="rId3"/>
-              <a:stretch>
-                <a:fillRect l="-16858" t="-15040" r="-2110" b="-34707"/>
-              </a:stretch>
-            </a:blipFill>
-          </p:spPr>
-        </p:sp>
-        <p:sp>
-          <p:nvSpPr>
-            <p:cNvPr name="Freeform 5" id="5"/>
-            <p:cNvSpPr/>
-            <p:nvPr/>
-          </p:nvSpPr>
-          <p:spPr>
-            <a:xfrm flipH="false" flipV="false" rot="0">
-              <a:off x="6850086" y="1829532"/>
-              <a:ext cx="10403127" cy="307682"/>
-            </a:xfrm>
-            <a:custGeom>
-              <a:avLst/>
-              <a:gdLst/>
-              <a:ahLst/>
-              <a:cxnLst/>
-              <a:rect r="r" b="b" t="t" l="l"/>
-              <a:pathLst>
-                <a:path h="307682" w="10403127">
-                  <a:moveTo>
-                    <a:pt x="0" y="0"/>
-                  </a:moveTo>
-                  <a:lnTo>
-                    <a:pt x="10403127" y="0"/>
-                  </a:lnTo>
-                  <a:lnTo>
-                    <a:pt x="10403127" y="307682"/>
-                  </a:lnTo>
-                  <a:lnTo>
-                    <a:pt x="0" y="307682"/>
-                  </a:lnTo>
-                  <a:lnTo>
-                    <a:pt x="0" y="0"/>
-                  </a:lnTo>
-                  <a:close/>
-                </a:path>
-              </a:pathLst>
-            </a:custGeom>
-            <a:blipFill>
-              <a:blip r:embed="rId4"/>
-              <a:stretch>
-                <a:fillRect l="0" t="-452658" r="0" b="-22134"/>
-              </a:stretch>
-            </a:blipFill>
-          </p:spPr>
-        </p:sp>
-        <p:sp>
-          <p:nvSpPr>
-            <p:cNvPr name="Freeform 6" id="6"/>
-            <p:cNvSpPr/>
-            <p:nvPr/>
-          </p:nvSpPr>
-          <p:spPr>
-            <a:xfrm flipH="false" flipV="false" rot="0">
-              <a:off x="4950031" y="452286"/>
-              <a:ext cx="1462566" cy="1462566"/>
-            </a:xfrm>
-            <a:custGeom>
-              <a:avLst/>
-              <a:gdLst/>
-              <a:ahLst/>
-              <a:cxnLst/>
-              <a:rect r="r" b="b" t="t" l="l"/>
-              <a:pathLst>
-                <a:path h="1462566" w="1462566">
-                  <a:moveTo>
-                    <a:pt x="0" y="0"/>
-                  </a:moveTo>
-                  <a:lnTo>
-                    <a:pt x="1462567" y="0"/>
-                  </a:lnTo>
-                  <a:lnTo>
-                    <a:pt x="1462567" y="1462566"/>
-                  </a:lnTo>
-                  <a:lnTo>
-                    <a:pt x="0" y="1462566"/>
-                  </a:lnTo>
-                  <a:lnTo>
-                    <a:pt x="0" y="0"/>
-                  </a:lnTo>
-                  <a:close/>
-                </a:path>
-              </a:pathLst>
-            </a:custGeom>
-            <a:blipFill>
-              <a:blip r:embed="rId5"/>
-              <a:stretch>
-                <a:fillRect l="0" t="0" r="0" b="0"/>
-              </a:stretch>
-            </a:blipFill>
-          </p:spPr>
-        </p:sp>
-        <p:sp>
-          <p:nvSpPr>
-            <p:cNvPr name="Freeform 7" id="7"/>
-            <p:cNvSpPr/>
-            <p:nvPr/>
-          </p:nvSpPr>
-          <p:spPr>
-            <a:xfrm flipH="false" flipV="false" rot="0">
-              <a:off x="1843084" y="596677"/>
-              <a:ext cx="1540537" cy="1540537"/>
-            </a:xfrm>
-            <a:custGeom>
-              <a:avLst/>
-              <a:gdLst/>
-              <a:ahLst/>
-              <a:cxnLst/>
-              <a:rect r="r" b="b" t="t" l="l"/>
-              <a:pathLst>
-                <a:path h="1540537" w="1540537">
-                  <a:moveTo>
-                    <a:pt x="0" y="0"/>
-                  </a:moveTo>
-                  <a:lnTo>
-                    <a:pt x="1540538" y="0"/>
-                  </a:lnTo>
-                  <a:lnTo>
-                    <a:pt x="1540538" y="1540537"/>
-                  </a:lnTo>
-                  <a:lnTo>
-                    <a:pt x="0" y="1540537"/>
-                  </a:lnTo>
-                  <a:lnTo>
-                    <a:pt x="0" y="0"/>
-                  </a:lnTo>
-                  <a:close/>
-                </a:path>
-              </a:pathLst>
-            </a:custGeom>
-            <a:blipFill>
-              <a:blip r:embed="rId6"/>
-              <a:stretch>
-                <a:fillRect l="-2310" t="-28500" r="0" b="-27400"/>
-              </a:stretch>
-            </a:blipFill>
-          </p:spPr>
-        </p:sp>
-        <p:sp>
-          <p:nvSpPr>
-            <p:cNvPr name="Freeform 8" id="8"/>
-            <p:cNvSpPr/>
-            <p:nvPr/>
-          </p:nvSpPr>
-          <p:spPr>
-            <a:xfrm flipH="false" flipV="false" rot="0">
-              <a:off x="18904179" y="429892"/>
-              <a:ext cx="2762820" cy="1781175"/>
-            </a:xfrm>
-            <a:custGeom>
-              <a:avLst/>
-              <a:gdLst/>
-              <a:ahLst/>
-              <a:cxnLst/>
-              <a:rect r="r" b="b" t="t" l="l"/>
-              <a:pathLst>
-                <a:path h="1781175" w="2762820">
-                  <a:moveTo>
-                    <a:pt x="0" y="0"/>
-                  </a:moveTo>
-                  <a:lnTo>
-                    <a:pt x="2762820" y="0"/>
-                  </a:lnTo>
-                  <a:lnTo>
-                    <a:pt x="2762820" y="1781175"/>
-                  </a:lnTo>
-                  <a:lnTo>
-                    <a:pt x="0" y="1781175"/>
-                  </a:lnTo>
-                  <a:lnTo>
-                    <a:pt x="0" y="0"/>
-                  </a:lnTo>
-                  <a:close/>
-                </a:path>
-              </a:pathLst>
-            </a:custGeom>
-            <a:blipFill>
-              <a:blip r:embed="rId7"/>
-              <a:stretch>
-                <a:fillRect l="0" t="0" r="0" b="0"/>
-              </a:stretch>
-            </a:blipFill>
-          </p:spPr>
-        </p:sp>
-        <p:sp>
-          <p:nvSpPr>
-            <p:cNvPr name="TextBox 9" id="9"/>
-            <p:cNvSpPr txBox="true"/>
-            <p:nvPr/>
-          </p:nvSpPr>
-          <p:spPr>
-            <a:xfrm rot="0">
-              <a:off x="3502261" y="2096044"/>
-              <a:ext cx="15750461" cy="445887"/>
-            </a:xfrm>
-            <a:prstGeom prst="rect">
-              <a:avLst/>
-            </a:prstGeom>
-          </p:spPr>
-          <p:txBody>
-            <a:bodyPr anchor="t" rtlCol="false" tIns="0" lIns="0" bIns="0" rIns="0">
-              <a:spAutoFit/>
-            </a:bodyPr>
-            <a:lstStyle/>
-            <a:p>
-              <a:pPr algn="ctr">
-                <a:lnSpc>
-                  <a:spcPts val="2698"/>
-                </a:lnSpc>
-              </a:pPr>
-              <a:r>
-                <a:rPr lang="en-US" sz="1927" spc="59">
-                  <a:solidFill>
-                    <a:srgbClr val="EEF8FD"/>
-                  </a:solidFill>
-                  <a:latin typeface="Lastica"/>
-                  <a:ea typeface="Lastica"/>
-                  <a:cs typeface="Lastica"/>
-                  <a:sym typeface="Lastica"/>
-                </a:rPr>
-                <a:t>DEPARTMENT OF COMPUTER SCIENCE AND ENGINEERING &amp; III CELL</a:t>
-              </a:r>
-            </a:p>
-          </p:txBody>
-        </p:sp>
-      </p:grpSp>
-    </p:spTree>
-  </p:cSld>
-  <p:clrMapOvr>
-    <a:masterClrMapping/>
-  </p:clrMapOvr>
-</p:sld>
-</file>
-
 <file path=ppt/theme/theme1.xml><?xml version="1.0" encoding="utf-8"?>
 <a:theme xmlns:a="http://schemas.openxmlformats.org/drawingml/2006/main" name="Office Theme">
   <a:themeElements>

--- a/public/PPT sankalp.pptx
+++ b/public/PPT sankalp.pptx
@@ -11,31 +11,25 @@
     <p:sldId id="259" r:id="rId9"/>
     <p:sldId id="260" r:id="rId10"/>
     <p:sldId id="261" r:id="rId11"/>
-    <p:sldId id="262" r:id="rId12"/>
-    <p:sldId id="263" r:id="rId13"/>
   </p:sldIdLst>
   <p:sldSz cx="18288000" cy="10287000"/>
   <p:notesSz cx="6858000" cy="9144000"/>
   <p:embeddedFontLst>
     <p:embeddedFont>
       <p:font typeface="Gotham Bold" charset="1" panose="00000000000000000000"/>
+      <p:regular r:id="rId12"/>
+    </p:embeddedFont>
+    <p:embeddedFont>
+      <p:font typeface="Lastica" charset="1" panose="02000500000000000000"/>
+      <p:regular r:id="rId13"/>
+    </p:embeddedFont>
+    <p:embeddedFont>
+      <p:font typeface="Poppins Bold" charset="1" panose="00000800000000000000"/>
       <p:regular r:id="rId14"/>
     </p:embeddedFont>
     <p:embeddedFont>
-      <p:font typeface="Lastica" charset="1" panose="02000500000000000000"/>
+      <p:font typeface="Intro Rust" charset="1" panose="00000500000000000000"/>
       <p:regular r:id="rId15"/>
-    </p:embeddedFont>
-    <p:embeddedFont>
-      <p:font typeface="Poppins Bold" charset="1" panose="00000800000000000000"/>
-      <p:regular r:id="rId16"/>
-    </p:embeddedFont>
-    <p:embeddedFont>
-      <p:font typeface="Intro Rust" charset="1" panose="00000500000000000000"/>
-      <p:regular r:id="rId17"/>
-    </p:embeddedFont>
-    <p:embeddedFont>
-      <p:font typeface="Poppins" charset="1" panose="00000500000000000000"/>
-      <p:regular r:id="rId18"/>
     </p:embeddedFont>
   </p:embeddedFontLst>
   <p:defaultTextStyle>
@@ -3338,341 +3332,280 @@
           </a:p>
         </p:txBody>
       </p:sp>
+      <p:sp>
+        <p:nvSpPr>
+          <p:cNvPr name="Freeform 6" id="6"/>
+          <p:cNvSpPr/>
+          <p:nvPr/>
+        </p:nvSpPr>
+        <p:spPr>
+          <a:xfrm flipH="false" flipV="false" rot="0">
+            <a:off x="327719" y="-503435"/>
+            <a:ext cx="17632563" cy="2482798"/>
+          </a:xfrm>
+          <a:custGeom>
+            <a:avLst/>
+            <a:gdLst/>
+            <a:ahLst/>
+            <a:cxnLst/>
+            <a:rect r="r" b="b" t="t" l="l"/>
+            <a:pathLst>
+              <a:path h="2482798" w="17632563">
+                <a:moveTo>
+                  <a:pt x="0" y="0"/>
+                </a:moveTo>
+                <a:lnTo>
+                  <a:pt x="17632562" y="0"/>
+                </a:lnTo>
+                <a:lnTo>
+                  <a:pt x="17632562" y="2482798"/>
+                </a:lnTo>
+                <a:lnTo>
+                  <a:pt x="0" y="2482798"/>
+                </a:lnTo>
+                <a:lnTo>
+                  <a:pt x="0" y="0"/>
+                </a:lnTo>
+                <a:close/>
+              </a:path>
+            </a:pathLst>
+          </a:custGeom>
+          <a:blipFill>
+            <a:blip r:embed="rId4"/>
+            <a:stretch>
+              <a:fillRect l="0" t="-175648" r="-6376" b="-407112"/>
+            </a:stretch>
+          </a:blipFill>
+        </p:spPr>
+      </p:sp>
+      <p:sp>
+        <p:nvSpPr>
+          <p:cNvPr name="Freeform 7" id="7"/>
+          <p:cNvSpPr/>
+          <p:nvPr/>
+        </p:nvSpPr>
+        <p:spPr>
+          <a:xfrm flipH="false" flipV="false" rot="0">
+            <a:off x="5465283" y="1242791"/>
+            <a:ext cx="7802345" cy="230761"/>
+          </a:xfrm>
+          <a:custGeom>
+            <a:avLst/>
+            <a:gdLst/>
+            <a:ahLst/>
+            <a:cxnLst/>
+            <a:rect r="r" b="b" t="t" l="l"/>
+            <a:pathLst>
+              <a:path h="230761" w="7802345">
+                <a:moveTo>
+                  <a:pt x="0" y="0"/>
+                </a:moveTo>
+                <a:lnTo>
+                  <a:pt x="7802345" y="0"/>
+                </a:lnTo>
+                <a:lnTo>
+                  <a:pt x="7802345" y="230762"/>
+                </a:lnTo>
+                <a:lnTo>
+                  <a:pt x="0" y="230762"/>
+                </a:lnTo>
+                <a:lnTo>
+                  <a:pt x="0" y="0"/>
+                </a:lnTo>
+                <a:close/>
+              </a:path>
+            </a:pathLst>
+          </a:custGeom>
+          <a:blipFill>
+            <a:blip r:embed="rId5"/>
+            <a:stretch>
+              <a:fillRect l="0" t="-452658" r="0" b="-22134"/>
+            </a:stretch>
+          </a:blipFill>
+        </p:spPr>
+      </p:sp>
+      <p:sp>
+        <p:nvSpPr>
+          <p:cNvPr name="Freeform 8" id="8"/>
+          <p:cNvSpPr/>
+          <p:nvPr/>
+        </p:nvSpPr>
+        <p:spPr>
+          <a:xfrm flipH="false" flipV="false" rot="0">
+            <a:off x="4040242" y="209857"/>
+            <a:ext cx="1096925" cy="1096925"/>
+          </a:xfrm>
+          <a:custGeom>
+            <a:avLst/>
+            <a:gdLst/>
+            <a:ahLst/>
+            <a:cxnLst/>
+            <a:rect r="r" b="b" t="t" l="l"/>
+            <a:pathLst>
+              <a:path h="1096925" w="1096925">
+                <a:moveTo>
+                  <a:pt x="0" y="0"/>
+                </a:moveTo>
+                <a:lnTo>
+                  <a:pt x="1096925" y="0"/>
+                </a:lnTo>
+                <a:lnTo>
+                  <a:pt x="1096925" y="1096925"/>
+                </a:lnTo>
+                <a:lnTo>
+                  <a:pt x="0" y="1096925"/>
+                </a:lnTo>
+                <a:lnTo>
+                  <a:pt x="0" y="0"/>
+                </a:lnTo>
+                <a:close/>
+              </a:path>
+            </a:pathLst>
+          </a:custGeom>
+          <a:blipFill>
+            <a:blip r:embed="rId6"/>
+            <a:stretch>
+              <a:fillRect l="0" t="0" r="0" b="0"/>
+            </a:stretch>
+          </a:blipFill>
+        </p:spPr>
+      </p:sp>
+      <p:sp>
+        <p:nvSpPr>
+          <p:cNvPr name="Freeform 9" id="9"/>
+          <p:cNvSpPr/>
+          <p:nvPr/>
+        </p:nvSpPr>
+        <p:spPr>
+          <a:xfrm flipH="false" flipV="false" rot="0">
+            <a:off x="1710032" y="318150"/>
+            <a:ext cx="1155403" cy="1155403"/>
+          </a:xfrm>
+          <a:custGeom>
+            <a:avLst/>
+            <a:gdLst/>
+            <a:ahLst/>
+            <a:cxnLst/>
+            <a:rect r="r" b="b" t="t" l="l"/>
+            <a:pathLst>
+              <a:path h="1155403" w="1155403">
+                <a:moveTo>
+                  <a:pt x="0" y="0"/>
+                </a:moveTo>
+                <a:lnTo>
+                  <a:pt x="1155403" y="0"/>
+                </a:lnTo>
+                <a:lnTo>
+                  <a:pt x="1155403" y="1155403"/>
+                </a:lnTo>
+                <a:lnTo>
+                  <a:pt x="0" y="1155403"/>
+                </a:lnTo>
+                <a:lnTo>
+                  <a:pt x="0" y="0"/>
+                </a:lnTo>
+                <a:close/>
+              </a:path>
+            </a:pathLst>
+          </a:custGeom>
+          <a:blipFill>
+            <a:blip r:embed="rId7"/>
+            <a:stretch>
+              <a:fillRect l="-2310" t="-28500" r="0" b="-27400"/>
+            </a:stretch>
+          </a:blipFill>
+        </p:spPr>
+      </p:sp>
+      <p:sp>
+        <p:nvSpPr>
+          <p:cNvPr name="Freeform 10" id="10"/>
+          <p:cNvSpPr/>
+          <p:nvPr/>
+        </p:nvSpPr>
+        <p:spPr>
+          <a:xfrm flipH="false" flipV="false" rot="0">
+            <a:off x="14505853" y="193061"/>
+            <a:ext cx="2072115" cy="1335881"/>
+          </a:xfrm>
+          <a:custGeom>
+            <a:avLst/>
+            <a:gdLst/>
+            <a:ahLst/>
+            <a:cxnLst/>
+            <a:rect r="r" b="b" t="t" l="l"/>
+            <a:pathLst>
+              <a:path h="1335881" w="2072115">
+                <a:moveTo>
+                  <a:pt x="0" y="0"/>
+                </a:moveTo>
+                <a:lnTo>
+                  <a:pt x="2072115" y="0"/>
+                </a:lnTo>
+                <a:lnTo>
+                  <a:pt x="2072115" y="1335882"/>
+                </a:lnTo>
+                <a:lnTo>
+                  <a:pt x="0" y="1335882"/>
+                </a:lnTo>
+                <a:lnTo>
+                  <a:pt x="0" y="0"/>
+                </a:lnTo>
+                <a:close/>
+              </a:path>
+            </a:pathLst>
+          </a:custGeom>
+          <a:blipFill>
+            <a:blip r:embed="rId8"/>
+            <a:stretch>
+              <a:fillRect l="0" t="0" r="0" b="0"/>
+            </a:stretch>
+          </a:blipFill>
+        </p:spPr>
+      </p:sp>
+      <p:sp>
+        <p:nvSpPr>
+          <p:cNvPr name="TextBox 11" id="11"/>
+          <p:cNvSpPr txBox="true"/>
+          <p:nvPr/>
+        </p:nvSpPr>
+        <p:spPr>
+          <a:xfrm rot="0">
+            <a:off x="2954414" y="1426006"/>
+            <a:ext cx="11812846" cy="351084"/>
+          </a:xfrm>
+          <a:prstGeom prst="rect">
+            <a:avLst/>
+          </a:prstGeom>
+        </p:spPr>
+        <p:txBody>
+          <a:bodyPr anchor="t" rtlCol="false" tIns="0" lIns="0" bIns="0" rIns="0">
+            <a:spAutoFit/>
+          </a:bodyPr>
+          <a:lstStyle/>
+          <a:p>
+            <a:pPr algn="ctr">
+              <a:lnSpc>
+                <a:spcPts val="2698"/>
+              </a:lnSpc>
+            </a:pPr>
+            <a:r>
+              <a:rPr lang="en-US" sz="1927" spc="59">
+                <a:solidFill>
+                  <a:srgbClr val="EEF8FD"/>
+                </a:solidFill>
+                <a:latin typeface="Lastica"/>
+                <a:ea typeface="Lastica"/>
+                <a:cs typeface="Lastica"/>
+                <a:sym typeface="Lastica"/>
+              </a:rPr>
+              <a:t>DEPARTMENT OF COMPUTER SCIENCE AND ENGINEERING &amp; III CELL</a:t>
+            </a:r>
+          </a:p>
+        </p:txBody>
+      </p:sp>
       <p:grpSp>
         <p:nvGrpSpPr>
-          <p:cNvPr name="Group 6" id="6"/>
-          <p:cNvGrpSpPr/>
-          <p:nvPr/>
-        </p:nvGrpSpPr>
-        <p:grpSpPr>
-          <a:xfrm rot="0">
-            <a:off x="327719" y="-503435"/>
-            <a:ext cx="17632563" cy="2482798"/>
-            <a:chOff x="0" y="0"/>
-            <a:chExt cx="23510084" cy="3310398"/>
-          </a:xfrm>
-        </p:grpSpPr>
-        <p:sp>
-          <p:nvSpPr>
-            <p:cNvPr name="Freeform 7" id="7"/>
-            <p:cNvSpPr/>
-            <p:nvPr/>
-          </p:nvSpPr>
-          <p:spPr>
-            <a:xfrm flipH="false" flipV="false" rot="0">
-              <a:off x="0" y="0"/>
-              <a:ext cx="23510084" cy="3310398"/>
-            </a:xfrm>
-            <a:custGeom>
-              <a:avLst/>
-              <a:gdLst/>
-              <a:ahLst/>
-              <a:cxnLst/>
-              <a:rect r="r" b="b" t="t" l="l"/>
-              <a:pathLst>
-                <a:path h="3310398" w="23510084">
-                  <a:moveTo>
-                    <a:pt x="0" y="0"/>
-                  </a:moveTo>
-                  <a:lnTo>
-                    <a:pt x="23510084" y="0"/>
-                  </a:lnTo>
-                  <a:lnTo>
-                    <a:pt x="23510084" y="3310398"/>
-                  </a:lnTo>
-                  <a:lnTo>
-                    <a:pt x="0" y="3310398"/>
-                  </a:lnTo>
-                  <a:lnTo>
-                    <a:pt x="0" y="0"/>
-                  </a:lnTo>
-                  <a:close/>
-                </a:path>
-              </a:pathLst>
-            </a:custGeom>
-            <a:blipFill>
-              <a:blip r:embed="rId4"/>
-              <a:stretch>
-                <a:fillRect l="0" t="-175648" r="-6376" b="-407112"/>
-              </a:stretch>
-            </a:blipFill>
-          </p:spPr>
-        </p:sp>
-        <p:sp>
-          <p:nvSpPr>
-            <p:cNvPr name="Freeform 8" id="8"/>
-            <p:cNvSpPr/>
-            <p:nvPr/>
-          </p:nvSpPr>
-          <p:spPr>
-            <a:xfrm flipH="false" flipV="false" rot="0">
-              <a:off x="6422315" y="790993"/>
-              <a:ext cx="11382637" cy="1537309"/>
-            </a:xfrm>
-            <a:custGeom>
-              <a:avLst/>
-              <a:gdLst/>
-              <a:ahLst/>
-              <a:cxnLst/>
-              <a:rect r="r" b="b" t="t" l="l"/>
-              <a:pathLst>
-                <a:path h="1537309" w="11382637">
-                  <a:moveTo>
-                    <a:pt x="0" y="0"/>
-                  </a:moveTo>
-                  <a:lnTo>
-                    <a:pt x="11382637" y="0"/>
-                  </a:lnTo>
-                  <a:lnTo>
-                    <a:pt x="11382637" y="1537309"/>
-                  </a:lnTo>
-                  <a:lnTo>
-                    <a:pt x="0" y="1537309"/>
-                  </a:lnTo>
-                  <a:lnTo>
-                    <a:pt x="0" y="0"/>
-                  </a:lnTo>
-                  <a:close/>
-                </a:path>
-              </a:pathLst>
-            </a:custGeom>
-            <a:blipFill>
-              <a:blip r:embed="rId5"/>
-              <a:stretch>
-                <a:fillRect l="-16858" t="-15040" r="-2110" b="-34707"/>
-              </a:stretch>
-            </a:blipFill>
-          </p:spPr>
-        </p:sp>
-        <p:sp>
-          <p:nvSpPr>
-            <p:cNvPr name="Freeform 9" id="9"/>
-            <p:cNvSpPr/>
-            <p:nvPr/>
-          </p:nvSpPr>
-          <p:spPr>
-            <a:xfrm flipH="false" flipV="false" rot="0">
-              <a:off x="6850086" y="2328302"/>
-              <a:ext cx="10403127" cy="307682"/>
-            </a:xfrm>
-            <a:custGeom>
-              <a:avLst/>
-              <a:gdLst/>
-              <a:ahLst/>
-              <a:cxnLst/>
-              <a:rect r="r" b="b" t="t" l="l"/>
-              <a:pathLst>
-                <a:path h="307682" w="10403127">
-                  <a:moveTo>
-                    <a:pt x="0" y="0"/>
-                  </a:moveTo>
-                  <a:lnTo>
-                    <a:pt x="10403127" y="0"/>
-                  </a:lnTo>
-                  <a:lnTo>
-                    <a:pt x="10403127" y="307682"/>
-                  </a:lnTo>
-                  <a:lnTo>
-                    <a:pt x="0" y="307682"/>
-                  </a:lnTo>
-                  <a:lnTo>
-                    <a:pt x="0" y="0"/>
-                  </a:lnTo>
-                  <a:close/>
-                </a:path>
-              </a:pathLst>
-            </a:custGeom>
-            <a:blipFill>
-              <a:blip r:embed="rId6"/>
-              <a:stretch>
-                <a:fillRect l="0" t="-452658" r="0" b="-22134"/>
-              </a:stretch>
-            </a:blipFill>
-          </p:spPr>
-        </p:sp>
-        <p:sp>
-          <p:nvSpPr>
-            <p:cNvPr name="Freeform 10" id="10"/>
-            <p:cNvSpPr/>
-            <p:nvPr/>
-          </p:nvSpPr>
-          <p:spPr>
-            <a:xfrm flipH="false" flipV="false" rot="0">
-              <a:off x="4950031" y="951056"/>
-              <a:ext cx="1462566" cy="1462566"/>
-            </a:xfrm>
-            <a:custGeom>
-              <a:avLst/>
-              <a:gdLst/>
-              <a:ahLst/>
-              <a:cxnLst/>
-              <a:rect r="r" b="b" t="t" l="l"/>
-              <a:pathLst>
-                <a:path h="1462566" w="1462566">
-                  <a:moveTo>
-                    <a:pt x="0" y="0"/>
-                  </a:moveTo>
-                  <a:lnTo>
-                    <a:pt x="1462567" y="0"/>
-                  </a:lnTo>
-                  <a:lnTo>
-                    <a:pt x="1462567" y="1462566"/>
-                  </a:lnTo>
-                  <a:lnTo>
-                    <a:pt x="0" y="1462566"/>
-                  </a:lnTo>
-                  <a:lnTo>
-                    <a:pt x="0" y="0"/>
-                  </a:lnTo>
-                  <a:close/>
-                </a:path>
-              </a:pathLst>
-            </a:custGeom>
-            <a:blipFill>
-              <a:blip r:embed="rId7"/>
-              <a:stretch>
-                <a:fillRect l="0" t="0" r="0" b="0"/>
-              </a:stretch>
-            </a:blipFill>
-          </p:spPr>
-        </p:sp>
-        <p:sp>
-          <p:nvSpPr>
-            <p:cNvPr name="Freeform 11" id="11"/>
-            <p:cNvSpPr/>
-            <p:nvPr/>
-          </p:nvSpPr>
-          <p:spPr>
-            <a:xfrm flipH="false" flipV="false" rot="0">
-              <a:off x="1843084" y="1095447"/>
-              <a:ext cx="1540537" cy="1540537"/>
-            </a:xfrm>
-            <a:custGeom>
-              <a:avLst/>
-              <a:gdLst/>
-              <a:ahLst/>
-              <a:cxnLst/>
-              <a:rect r="r" b="b" t="t" l="l"/>
-              <a:pathLst>
-                <a:path h="1540537" w="1540537">
-                  <a:moveTo>
-                    <a:pt x="0" y="0"/>
-                  </a:moveTo>
-                  <a:lnTo>
-                    <a:pt x="1540538" y="0"/>
-                  </a:lnTo>
-                  <a:lnTo>
-                    <a:pt x="1540538" y="1540537"/>
-                  </a:lnTo>
-                  <a:lnTo>
-                    <a:pt x="0" y="1540537"/>
-                  </a:lnTo>
-                  <a:lnTo>
-                    <a:pt x="0" y="0"/>
-                  </a:lnTo>
-                  <a:close/>
-                </a:path>
-              </a:pathLst>
-            </a:custGeom>
-            <a:blipFill>
-              <a:blip r:embed="rId8"/>
-              <a:stretch>
-                <a:fillRect l="-2310" t="-28500" r="0" b="-27400"/>
-              </a:stretch>
-            </a:blipFill>
-          </p:spPr>
-        </p:sp>
-        <p:sp>
-          <p:nvSpPr>
-            <p:cNvPr name="Freeform 12" id="12"/>
-            <p:cNvSpPr/>
-            <p:nvPr/>
-          </p:nvSpPr>
-          <p:spPr>
-            <a:xfrm flipH="false" flipV="false" rot="0">
-              <a:off x="18904179" y="928662"/>
-              <a:ext cx="2762820" cy="1781175"/>
-            </a:xfrm>
-            <a:custGeom>
-              <a:avLst/>
-              <a:gdLst/>
-              <a:ahLst/>
-              <a:cxnLst/>
-              <a:rect r="r" b="b" t="t" l="l"/>
-              <a:pathLst>
-                <a:path h="1781175" w="2762820">
-                  <a:moveTo>
-                    <a:pt x="0" y="0"/>
-                  </a:moveTo>
-                  <a:lnTo>
-                    <a:pt x="2762820" y="0"/>
-                  </a:lnTo>
-                  <a:lnTo>
-                    <a:pt x="2762820" y="1781175"/>
-                  </a:lnTo>
-                  <a:lnTo>
-                    <a:pt x="0" y="1781175"/>
-                  </a:lnTo>
-                  <a:lnTo>
-                    <a:pt x="0" y="0"/>
-                  </a:lnTo>
-                  <a:close/>
-                </a:path>
-              </a:pathLst>
-            </a:custGeom>
-            <a:blipFill>
-              <a:blip r:embed="rId9"/>
-              <a:stretch>
-                <a:fillRect l="0" t="0" r="0" b="0"/>
-              </a:stretch>
-            </a:blipFill>
-          </p:spPr>
-        </p:sp>
-        <p:sp>
-          <p:nvSpPr>
-            <p:cNvPr name="TextBox 13" id="13"/>
-            <p:cNvSpPr txBox="true"/>
-            <p:nvPr/>
-          </p:nvSpPr>
-          <p:spPr>
-            <a:xfrm rot="0">
-              <a:off x="3502261" y="2594814"/>
-              <a:ext cx="15750461" cy="445887"/>
-            </a:xfrm>
-            <a:prstGeom prst="rect">
-              <a:avLst/>
-            </a:prstGeom>
-          </p:spPr>
-          <p:txBody>
-            <a:bodyPr anchor="t" rtlCol="false" tIns="0" lIns="0" bIns="0" rIns="0">
-              <a:spAutoFit/>
-            </a:bodyPr>
-            <a:lstStyle/>
-            <a:p>
-              <a:pPr algn="ctr">
-                <a:lnSpc>
-                  <a:spcPts val="2698"/>
-                </a:lnSpc>
-              </a:pPr>
-              <a:r>
-                <a:rPr lang="en-US" sz="1927" spc="59">
-                  <a:solidFill>
-                    <a:srgbClr val="EEF8FD"/>
-                  </a:solidFill>
-                  <a:latin typeface="Lastica"/>
-                  <a:ea typeface="Lastica"/>
-                  <a:cs typeface="Lastica"/>
-                  <a:sym typeface="Lastica"/>
-                </a:rPr>
-                <a:t>DEPARTMENT OF COMPUTER SCIENCE AND ENGINEERING &amp; III CELL</a:t>
-              </a:r>
-            </a:p>
-          </p:txBody>
-        </p:sp>
-      </p:grpSp>
-      <p:grpSp>
-        <p:nvGrpSpPr>
-          <p:cNvPr name="Group 14" id="14"/>
+          <p:cNvPr name="Group 12" id="12"/>
           <p:cNvGrpSpPr/>
           <p:nvPr/>
         </p:nvGrpSpPr>
@@ -3686,7 +3619,7 @@
         </p:grpSpPr>
         <p:sp>
           <p:nvSpPr>
-            <p:cNvPr name="Freeform 15" id="15"/>
+            <p:cNvPr name="Freeform 13" id="13"/>
             <p:cNvSpPr/>
             <p:nvPr/>
           </p:nvSpPr>
@@ -3723,7 +3656,7 @@
               </a:pathLst>
             </a:custGeom>
             <a:blipFill>
-              <a:blip r:embed="rId10"/>
+              <a:blip r:embed="rId9"/>
               <a:stretch>
                 <a:fillRect l="-7089" t="-31562" r="-2613" b="-82297"/>
               </a:stretch>
@@ -3732,7 +3665,7 @@
         </p:sp>
         <p:sp>
           <p:nvSpPr>
-            <p:cNvPr name="Freeform 16" id="16"/>
+            <p:cNvPr name="Freeform 14" id="14"/>
             <p:cNvSpPr/>
             <p:nvPr/>
           </p:nvSpPr>
@@ -3769,7 +3702,7 @@
               </a:pathLst>
             </a:custGeom>
             <a:blipFill>
-              <a:blip r:embed="rId11"/>
+              <a:blip r:embed="rId10"/>
               <a:stretch>
                 <a:fillRect l="-2499" t="-819749" r="0" b="-377429"/>
               </a:stretch>
@@ -3777,6 +3710,52 @@
           </p:spPr>
         </p:sp>
       </p:grpSp>
+      <p:sp>
+        <p:nvSpPr>
+          <p:cNvPr name="Freeform 15" id="15"/>
+          <p:cNvSpPr/>
+          <p:nvPr/>
+        </p:nvSpPr>
+        <p:spPr>
+          <a:xfrm flipH="false" flipV="false" rot="0">
+            <a:off x="5034699" y="-253075"/>
+            <a:ext cx="9732561" cy="1495866"/>
+          </a:xfrm>
+          <a:custGeom>
+            <a:avLst/>
+            <a:gdLst/>
+            <a:ahLst/>
+            <a:cxnLst/>
+            <a:rect r="r" b="b" t="t" l="l"/>
+            <a:pathLst>
+              <a:path h="1495866" w="9732561">
+                <a:moveTo>
+                  <a:pt x="0" y="0"/>
+                </a:moveTo>
+                <a:lnTo>
+                  <a:pt x="9732561" y="0"/>
+                </a:lnTo>
+                <a:lnTo>
+                  <a:pt x="9732561" y="1495866"/>
+                </a:lnTo>
+                <a:lnTo>
+                  <a:pt x="0" y="1495866"/>
+                </a:lnTo>
+                <a:lnTo>
+                  <a:pt x="0" y="0"/>
+                </a:lnTo>
+                <a:close/>
+              </a:path>
+            </a:pathLst>
+          </a:custGeom>
+          <a:blipFill>
+            <a:blip r:embed="rId11"/>
+            <a:stretch>
+              <a:fillRect l="-15599" t="0" r="-2087" b="-30169"/>
+            </a:stretch>
+          </a:blipFill>
+        </p:spPr>
+      </p:sp>
     </p:spTree>
   </p:cSld>
   <p:clrMapOvr>
@@ -3927,7 +3906,7 @@
         </p:nvGrpSpPr>
         <p:grpSpPr>
           <a:xfrm rot="0">
-            <a:off x="7005717" y="3254154"/>
+            <a:off x="6677406" y="3254154"/>
             <a:ext cx="4276565" cy="3778691"/>
             <a:chOff x="0" y="0"/>
             <a:chExt cx="5702087" cy="5038255"/>
@@ -4307,7 +4286,7 @@
           <p:spPr>
             <a:xfrm rot="0">
               <a:off x="9268836" y="255116"/>
-              <a:ext cx="8871083" cy="1372650"/>
+              <a:ext cx="8871083" cy="1372606"/>
             </a:xfrm>
             <a:prstGeom prst="rect">
               <a:avLst/>
@@ -4334,107 +4313,12 @@
                   <a:cs typeface="Intro Rust"/>
                   <a:sym typeface="Intro Rust"/>
                 </a:rPr>
-                <a:t>Problem Understanding &amp;</a:t>
-              </a:r>
-            </a:p>
-            <a:p>
-              <a:pPr algn="ctr">
-                <a:lnSpc>
-                  <a:spcPts val="4041"/>
-                </a:lnSpc>
-              </a:pPr>
-              <a:r>
-                <a:rPr lang="en-US" sz="3545">
-                  <a:solidFill>
-                    <a:srgbClr val="000000"/>
-                  </a:solidFill>
-                  <a:latin typeface="Intro Rust"/>
-                  <a:ea typeface="Intro Rust"/>
-                  <a:cs typeface="Intro Rust"/>
-                  <a:sym typeface="Intro Rust"/>
-                </a:rPr>
-                <a:t> Domain Relevance</a:t>
+                <a:t>solution to the problem statement </a:t>
               </a:r>
             </a:p>
           </p:txBody>
         </p:sp>
       </p:grpSp>
-      <p:sp>
-        <p:nvSpPr>
-          <p:cNvPr name="TextBox 16" id="16"/>
-          <p:cNvSpPr txBox="true"/>
-          <p:nvPr/>
-        </p:nvSpPr>
-        <p:spPr>
-          <a:xfrm rot="0">
-            <a:off x="780843" y="2220376"/>
-            <a:ext cx="13496032" cy="1334769"/>
-          </a:xfrm>
-          <a:prstGeom prst="rect">
-            <a:avLst/>
-          </a:prstGeom>
-        </p:spPr>
-        <p:txBody>
-          <a:bodyPr anchor="t" rtlCol="false" tIns="0" lIns="0" bIns="0" rIns="0">
-            <a:spAutoFit/>
-          </a:bodyPr>
-          <a:lstStyle/>
-          <a:p>
-            <a:pPr algn="l" marL="798838" indent="-399419" lvl="1">
-              <a:lnSpc>
-                <a:spcPts val="5180"/>
-              </a:lnSpc>
-              <a:buFont typeface="Arial"/>
-              <a:buChar char="•"/>
-            </a:pPr>
-            <a:r>
-              <a:rPr lang="en-US" sz="3700">
-                <a:solidFill>
-                  <a:srgbClr val="000000"/>
-                </a:solidFill>
-                <a:latin typeface="Poppins"/>
-                <a:ea typeface="Poppins"/>
-                <a:cs typeface="Poppins"/>
-                <a:sym typeface="Poppins"/>
-              </a:rPr>
-              <a:t>Is the problem clearly </a:t>
-            </a:r>
-            <a:r>
-              <a:rPr lang="en-US" sz="3700">
-                <a:solidFill>
-                  <a:srgbClr val="000000"/>
-                </a:solidFill>
-                <a:latin typeface="Poppins"/>
-                <a:ea typeface="Poppins"/>
-                <a:cs typeface="Poppins"/>
-                <a:sym typeface="Poppins"/>
-              </a:rPr>
-              <a:t>defined?</a:t>
-            </a:r>
-          </a:p>
-          <a:p>
-            <a:pPr algn="l" marL="798838" indent="-399419" lvl="1">
-              <a:lnSpc>
-                <a:spcPts val="5180"/>
-              </a:lnSpc>
-              <a:buFont typeface="Arial"/>
-              <a:buChar char="•"/>
-            </a:pPr>
-            <a:r>
-              <a:rPr lang="en-US" sz="3700">
-                <a:solidFill>
-                  <a:srgbClr val="000000"/>
-                </a:solidFill>
-                <a:latin typeface="Poppins"/>
-                <a:ea typeface="Poppins"/>
-                <a:cs typeface="Poppins"/>
-                <a:sym typeface="Poppins"/>
-              </a:rPr>
-              <a:t> Does it match the given domain/problem statement?</a:t>
-            </a:r>
-          </a:p>
-        </p:txBody>
-      </p:sp>
     </p:spTree>
   </p:cSld>
   <p:clrMapOvr>
@@ -4585,7 +4469,7 @@
         </p:nvGrpSpPr>
         <p:grpSpPr>
           <a:xfrm rot="0">
-            <a:off x="7005717" y="3254154"/>
+            <a:off x="6732124" y="3500388"/>
             <a:ext cx="4276565" cy="3778691"/>
             <a:chOff x="0" y="0"/>
             <a:chExt cx="5702087" cy="5038255"/>
@@ -4743,9 +4627,9 @@
         <p:grpSpPr>
           <a:xfrm rot="0">
             <a:off x="486373" y="213427"/>
-            <a:ext cx="15806860" cy="1630974"/>
+            <a:ext cx="15806860" cy="1285059"/>
             <a:chOff x="0" y="0"/>
-            <a:chExt cx="21075813" cy="2174632"/>
+            <a:chExt cx="21075813" cy="1713411"/>
           </a:xfrm>
         </p:grpSpPr>
         <p:sp>
@@ -4965,7 +4849,7 @@
           <p:spPr>
             <a:xfrm rot="0">
               <a:off x="6542652" y="434078"/>
-              <a:ext cx="13881704" cy="1740554"/>
+              <a:ext cx="13881704" cy="823062"/>
             </a:xfrm>
             <a:prstGeom prst="rect">
               <a:avLst/>
@@ -4979,7 +4863,7 @@
             <a:p>
               <a:pPr algn="ctr">
                 <a:lnSpc>
-                  <a:spcPts val="4725"/>
+                  <a:spcPts val="4726"/>
                 </a:lnSpc>
               </a:pPr>
               <a:r>
@@ -4992,74 +4876,12 @@
                   <a:cs typeface="Intro Rust"/>
                   <a:sym typeface="Intro Rust"/>
                 </a:rPr>
-                <a:t>Innovation &amp; Creativity</a:t>
+                <a:t> architechture / workflow</a:t>
               </a:r>
-            </a:p>
-            <a:p>
-              <a:pPr algn="ctr">
-                <a:lnSpc>
-                  <a:spcPts val="5410"/>
-                </a:lnSpc>
-              </a:pPr>
             </a:p>
           </p:txBody>
         </p:sp>
       </p:grpSp>
-      <p:sp>
-        <p:nvSpPr>
-          <p:cNvPr name="TextBox 16" id="16"/>
-          <p:cNvSpPr txBox="true"/>
-          <p:nvPr/>
-        </p:nvSpPr>
-        <p:spPr>
-          <a:xfrm rot="0">
-            <a:off x="780843" y="2220376"/>
-            <a:ext cx="17507157" cy="1334769"/>
-          </a:xfrm>
-          <a:prstGeom prst="rect">
-            <a:avLst/>
-          </a:prstGeom>
-        </p:spPr>
-        <p:txBody>
-          <a:bodyPr anchor="t" rtlCol="false" tIns="0" lIns="0" bIns="0" rIns="0">
-            <a:spAutoFit/>
-          </a:bodyPr>
-          <a:lstStyle/>
-          <a:p>
-            <a:pPr algn="l" marL="798838" indent="-399419" lvl="1">
-              <a:lnSpc>
-                <a:spcPts val="5180"/>
-              </a:lnSpc>
-              <a:buFont typeface="Arial"/>
-              <a:buChar char="•"/>
-            </a:pPr>
-            <a:r>
-              <a:rPr lang="en-US" sz="3700">
-                <a:solidFill>
-                  <a:srgbClr val="000000"/>
-                </a:solidFill>
-                <a:latin typeface="Poppins"/>
-                <a:ea typeface="Poppins"/>
-                <a:cs typeface="Poppins"/>
-                <a:sym typeface="Poppins"/>
-              </a:rPr>
-              <a:t>Is the idea u</a:t>
-            </a:r>
-            <a:r>
-              <a:rPr lang="en-US" sz="3700">
-                <a:solidFill>
-                  <a:srgbClr val="000000"/>
-                </a:solidFill>
-                <a:latin typeface="Poppins"/>
-                <a:ea typeface="Poppins"/>
-                <a:cs typeface="Poppins"/>
-                <a:sym typeface="Poppins"/>
-              </a:rPr>
-              <a:t>nique or does it bring a new approach to an existing problem?</a:t>
-            </a:r>
-          </a:p>
-        </p:txBody>
-      </p:sp>
     </p:spTree>
   </p:cSld>
   <p:clrMapOvr>
@@ -5069,1301 +4891,6 @@
 </file>
 
 <file path=ppt/slides/slide4.xml><?xml version="1.0" encoding="utf-8"?>
-<p:sld xmlns:p="http://schemas.openxmlformats.org/presentationml/2006/main" xmlns:a="http://schemas.openxmlformats.org/drawingml/2006/main" xmlns:r="http://schemas.openxmlformats.org/officeDocument/2006/relationships">
-  <p:cSld>
-    <p:bg>
-      <p:bgPr>
-        <a:solidFill>
-          <a:srgbClr val="DFF5BB"/>
-        </a:solidFill>
-      </p:bgPr>
-    </p:bg>
-    <p:spTree>
-      <p:nvGrpSpPr>
-        <p:cNvPr id="1" name=""/>
-        <p:cNvGrpSpPr/>
-        <p:nvPr/>
-      </p:nvGrpSpPr>
-      <p:grpSpPr>
-        <a:xfrm>
-          <a:off x="0" y="0"/>
-          <a:ext cx="0" cy="0"/>
-          <a:chOff x="0" y="0"/>
-          <a:chExt cx="0" cy="0"/>
-        </a:xfrm>
-      </p:grpSpPr>
-      <p:grpSp>
-        <p:nvGrpSpPr>
-          <p:cNvPr name="Group 2" id="2"/>
-          <p:cNvGrpSpPr/>
-          <p:nvPr/>
-        </p:nvGrpSpPr>
-        <p:grpSpPr>
-          <a:xfrm rot="0">
-            <a:off x="579746" y="1572245"/>
-            <a:ext cx="17128507" cy="8308731"/>
-            <a:chOff x="0" y="0"/>
-            <a:chExt cx="842733" cy="408795"/>
-          </a:xfrm>
-        </p:grpSpPr>
-        <p:sp>
-          <p:nvSpPr>
-            <p:cNvPr name="Freeform 3" id="3"/>
-            <p:cNvSpPr/>
-            <p:nvPr/>
-          </p:nvSpPr>
-          <p:spPr>
-            <a:xfrm flipH="false" flipV="false" rot="0">
-              <a:off x="0" y="0"/>
-              <a:ext cx="842733" cy="408795"/>
-            </a:xfrm>
-            <a:custGeom>
-              <a:avLst/>
-              <a:gdLst/>
-              <a:ahLst/>
-              <a:cxnLst/>
-              <a:rect r="r" b="b" t="t" l="l"/>
-              <a:pathLst>
-                <a:path h="408795" w="842733">
-                  <a:moveTo>
-                    <a:pt x="20834" y="0"/>
-                  </a:moveTo>
-                  <a:lnTo>
-                    <a:pt x="821899" y="0"/>
-                  </a:lnTo>
-                  <a:cubicBezTo>
-                    <a:pt x="833405" y="0"/>
-                    <a:pt x="842733" y="9328"/>
-                    <a:pt x="842733" y="20834"/>
-                  </a:cubicBezTo>
-                  <a:lnTo>
-                    <a:pt x="842733" y="387961"/>
-                  </a:lnTo>
-                  <a:cubicBezTo>
-                    <a:pt x="842733" y="393486"/>
-                    <a:pt x="840538" y="398785"/>
-                    <a:pt x="836631" y="402692"/>
-                  </a:cubicBezTo>
-                  <a:cubicBezTo>
-                    <a:pt x="832724" y="406600"/>
-                    <a:pt x="827424" y="408795"/>
-                    <a:pt x="821899" y="408795"/>
-                  </a:cubicBezTo>
-                  <a:lnTo>
-                    <a:pt x="20834" y="408795"/>
-                  </a:lnTo>
-                  <a:cubicBezTo>
-                    <a:pt x="9328" y="408795"/>
-                    <a:pt x="0" y="399467"/>
-                    <a:pt x="0" y="387961"/>
-                  </a:cubicBezTo>
-                  <a:lnTo>
-                    <a:pt x="0" y="20834"/>
-                  </a:lnTo>
-                  <a:cubicBezTo>
-                    <a:pt x="0" y="9328"/>
-                    <a:pt x="9328" y="0"/>
-                    <a:pt x="20834" y="0"/>
-                  </a:cubicBezTo>
-                  <a:close/>
-                </a:path>
-              </a:pathLst>
-            </a:custGeom>
-            <a:solidFill>
-              <a:srgbClr val="FFFFFF"/>
-            </a:solidFill>
-          </p:spPr>
-        </p:sp>
-        <p:sp>
-          <p:nvSpPr>
-            <p:cNvPr name="TextBox 4" id="4"/>
-            <p:cNvSpPr txBox="true"/>
-            <p:nvPr/>
-          </p:nvSpPr>
-          <p:spPr>
-            <a:xfrm>
-              <a:off x="0" y="-66675"/>
-              <a:ext cx="842733" cy="475470"/>
-            </a:xfrm>
-            <a:prstGeom prst="rect">
-              <a:avLst/>
-            </a:prstGeom>
-          </p:spPr>
-          <p:txBody>
-            <a:bodyPr anchor="ctr" rtlCol="false" tIns="50800" lIns="50800" bIns="50800" rIns="50800"/>
-            <a:lstStyle/>
-            <a:p>
-              <a:pPr algn="ctr">
-                <a:lnSpc>
-                  <a:spcPts val="2698"/>
-                </a:lnSpc>
-              </a:pPr>
-            </a:p>
-          </p:txBody>
-        </p:sp>
-      </p:grpSp>
-      <p:grpSp>
-        <p:nvGrpSpPr>
-          <p:cNvPr name="Group 5" id="5"/>
-          <p:cNvGrpSpPr/>
-          <p:nvPr/>
-        </p:nvGrpSpPr>
-        <p:grpSpPr>
-          <a:xfrm rot="0">
-            <a:off x="7005717" y="3254154"/>
-            <a:ext cx="4276565" cy="3778691"/>
-            <a:chOff x="0" y="0"/>
-            <a:chExt cx="5702087" cy="5038255"/>
-          </a:xfrm>
-        </p:grpSpPr>
-        <p:sp>
-          <p:nvSpPr>
-            <p:cNvPr name="Freeform 6" id="6"/>
-            <p:cNvSpPr/>
-            <p:nvPr/>
-          </p:nvSpPr>
-          <p:spPr>
-            <a:xfrm flipH="false" flipV="false" rot="0">
-              <a:off x="420319" y="0"/>
-              <a:ext cx="4861448" cy="4004822"/>
-            </a:xfrm>
-            <a:custGeom>
-              <a:avLst/>
-              <a:gdLst/>
-              <a:ahLst/>
-              <a:cxnLst/>
-              <a:rect r="r" b="b" t="t" l="l"/>
-              <a:pathLst>
-                <a:path h="4004822" w="4861448">
-                  <a:moveTo>
-                    <a:pt x="0" y="0"/>
-                  </a:moveTo>
-                  <a:lnTo>
-                    <a:pt x="4861449" y="0"/>
-                  </a:lnTo>
-                  <a:lnTo>
-                    <a:pt x="4861449" y="4004822"/>
-                  </a:lnTo>
-                  <a:lnTo>
-                    <a:pt x="0" y="4004822"/>
-                  </a:lnTo>
-                  <a:lnTo>
-                    <a:pt x="0" y="0"/>
-                  </a:lnTo>
-                  <a:close/>
-                </a:path>
-              </a:pathLst>
-            </a:custGeom>
-            <a:blipFill>
-              <a:blip r:embed="rId2">
-                <a:alphaModFix amt="17000"/>
-              </a:blip>
-              <a:stretch>
-                <a:fillRect l="-11082" t="-31562" r="-6294" b="-82297"/>
-              </a:stretch>
-            </a:blipFill>
-          </p:spPr>
-        </p:sp>
-        <p:sp>
-          <p:nvSpPr>
-            <p:cNvPr name="Freeform 7" id="7"/>
-            <p:cNvSpPr/>
-            <p:nvPr/>
-          </p:nvSpPr>
-          <p:spPr>
-            <a:xfrm flipH="false" flipV="false" rot="0">
-              <a:off x="0" y="4314679"/>
-              <a:ext cx="5702087" cy="723576"/>
-            </a:xfrm>
-            <a:custGeom>
-              <a:avLst/>
-              <a:gdLst/>
-              <a:ahLst/>
-              <a:cxnLst/>
-              <a:rect r="r" b="b" t="t" l="l"/>
-              <a:pathLst>
-                <a:path h="723576" w="5702087">
-                  <a:moveTo>
-                    <a:pt x="0" y="0"/>
-                  </a:moveTo>
-                  <a:lnTo>
-                    <a:pt x="5702087" y="0"/>
-                  </a:lnTo>
-                  <a:lnTo>
-                    <a:pt x="5702087" y="723576"/>
-                  </a:lnTo>
-                  <a:lnTo>
-                    <a:pt x="0" y="723576"/>
-                  </a:lnTo>
-                  <a:lnTo>
-                    <a:pt x="0" y="0"/>
-                  </a:lnTo>
-                  <a:close/>
-                </a:path>
-              </a:pathLst>
-            </a:custGeom>
-            <a:blipFill>
-              <a:blip r:embed="rId3">
-                <a:alphaModFix amt="17000"/>
-              </a:blip>
-              <a:stretch>
-                <a:fillRect l="-2499" t="-762883" r="0" b="-349482"/>
-              </a:stretch>
-            </a:blipFill>
-          </p:spPr>
-        </p:sp>
-      </p:grpSp>
-      <p:sp>
-        <p:nvSpPr>
-          <p:cNvPr name="Freeform 8" id="8"/>
-          <p:cNvSpPr/>
-          <p:nvPr/>
-        </p:nvSpPr>
-        <p:spPr>
-          <a:xfrm flipH="false" flipV="false" rot="0">
-            <a:off x="16686012" y="287186"/>
-            <a:ext cx="1062335" cy="1076626"/>
-          </a:xfrm>
-          <a:custGeom>
-            <a:avLst/>
-            <a:gdLst/>
-            <a:ahLst/>
-            <a:cxnLst/>
-            <a:rect r="r" b="b" t="t" l="l"/>
-            <a:pathLst>
-              <a:path h="1076626" w="1062335">
-                <a:moveTo>
-                  <a:pt x="0" y="0"/>
-                </a:moveTo>
-                <a:lnTo>
-                  <a:pt x="1062334" y="0"/>
-                </a:lnTo>
-                <a:lnTo>
-                  <a:pt x="1062334" y="1076627"/>
-                </a:lnTo>
-                <a:lnTo>
-                  <a:pt x="0" y="1076627"/>
-                </a:lnTo>
-                <a:lnTo>
-                  <a:pt x="0" y="0"/>
-                </a:lnTo>
-                <a:close/>
-              </a:path>
-            </a:pathLst>
-          </a:custGeom>
-          <a:blipFill>
-            <a:blip r:embed="rId4"/>
-            <a:stretch>
-              <a:fillRect l="0" t="0" r="0" b="0"/>
-            </a:stretch>
-          </a:blipFill>
-        </p:spPr>
-      </p:sp>
-      <p:grpSp>
-        <p:nvGrpSpPr>
-          <p:cNvPr name="Group 9" id="9"/>
-          <p:cNvGrpSpPr/>
-          <p:nvPr/>
-        </p:nvGrpSpPr>
-        <p:grpSpPr>
-          <a:xfrm rot="0">
-            <a:off x="486373" y="213427"/>
-            <a:ext cx="15806860" cy="1285059"/>
-            <a:chOff x="0" y="0"/>
-            <a:chExt cx="21075813" cy="1713411"/>
-          </a:xfrm>
-        </p:grpSpPr>
-        <p:sp>
-          <p:nvSpPr>
-            <p:cNvPr name="Freeform 10" id="10"/>
-            <p:cNvSpPr/>
-            <p:nvPr/>
-          </p:nvSpPr>
-          <p:spPr>
-            <a:xfrm flipH="false" flipV="false" rot="0">
-              <a:off x="0" y="98345"/>
-              <a:ext cx="6051549" cy="1542121"/>
-            </a:xfrm>
-            <a:custGeom>
-              <a:avLst/>
-              <a:gdLst/>
-              <a:ahLst/>
-              <a:cxnLst/>
-              <a:rect r="r" b="b" t="t" l="l"/>
-              <a:pathLst>
-                <a:path h="1542121" w="6051549">
-                  <a:moveTo>
-                    <a:pt x="0" y="0"/>
-                  </a:moveTo>
-                  <a:lnTo>
-                    <a:pt x="6051549" y="0"/>
-                  </a:lnTo>
-                  <a:lnTo>
-                    <a:pt x="6051549" y="1542121"/>
-                  </a:lnTo>
-                  <a:lnTo>
-                    <a:pt x="0" y="1542121"/>
-                  </a:lnTo>
-                  <a:lnTo>
-                    <a:pt x="0" y="0"/>
-                  </a:lnTo>
-                  <a:close/>
-                </a:path>
-              </a:pathLst>
-            </a:custGeom>
-            <a:blipFill>
-              <a:blip r:embed="rId5">
-                <a:extLst>
-                  <a:ext uri="{96DAC541-7B7A-43D3-8B79-37D633B846F1}">
-                    <asvg:svgBlip xmlns:asvg="http://schemas.microsoft.com/office/drawing/2016/SVG/main" r:embed="rId6"/>
-                  </a:ext>
-                </a:extLst>
-              </a:blip>
-              <a:stretch>
-                <a:fillRect l="0" t="0" r="0" b="0"/>
-              </a:stretch>
-            </a:blipFill>
-          </p:spPr>
-        </p:sp>
-        <p:sp>
-          <p:nvSpPr>
-            <p:cNvPr name="TextBox 11" id="11"/>
-            <p:cNvSpPr txBox="true"/>
-            <p:nvPr/>
-          </p:nvSpPr>
-          <p:spPr>
-            <a:xfrm rot="0">
-              <a:off x="392627" y="342178"/>
-              <a:ext cx="2003298" cy="952652"/>
-            </a:xfrm>
-            <a:prstGeom prst="rect">
-              <a:avLst/>
-            </a:prstGeom>
-          </p:spPr>
-          <p:txBody>
-            <a:bodyPr anchor="t" rtlCol="false" tIns="0" lIns="0" bIns="0" rIns="0">
-              <a:spAutoFit/>
-            </a:bodyPr>
-            <a:lstStyle/>
-            <a:p>
-              <a:pPr algn="ctr">
-                <a:lnSpc>
-                  <a:spcPts val="2880"/>
-                </a:lnSpc>
-              </a:pPr>
-              <a:r>
-                <a:rPr lang="en-US" sz="2057" b="true">
-                  <a:solidFill>
-                    <a:srgbClr val="000000"/>
-                  </a:solidFill>
-                  <a:latin typeface="Poppins Bold"/>
-                  <a:ea typeface="Poppins Bold"/>
-                  <a:cs typeface="Poppins Bold"/>
-                  <a:sym typeface="Poppins Bold"/>
-                </a:rPr>
-                <a:t>TEAM NAME</a:t>
-              </a:r>
-            </a:p>
-          </p:txBody>
-        </p:sp>
-        <p:grpSp>
-          <p:nvGrpSpPr>
-            <p:cNvPr name="Group 12" id="12"/>
-            <p:cNvGrpSpPr/>
-            <p:nvPr/>
-          </p:nvGrpSpPr>
-          <p:grpSpPr>
-            <a:xfrm rot="0">
-              <a:off x="6415652" y="0"/>
-              <a:ext cx="14660161" cy="1713411"/>
-              <a:chOff x="0" y="0"/>
-              <a:chExt cx="540967" cy="63226"/>
-            </a:xfrm>
-          </p:grpSpPr>
-          <p:sp>
-            <p:nvSpPr>
-              <p:cNvPr name="Freeform 13" id="13"/>
-              <p:cNvSpPr/>
-              <p:nvPr/>
-            </p:nvSpPr>
-            <p:spPr>
-              <a:xfrm flipH="false" flipV="false" rot="0">
-                <a:off x="0" y="0"/>
-                <a:ext cx="540967" cy="63226"/>
-              </a:xfrm>
-              <a:custGeom>
-                <a:avLst/>
-                <a:gdLst/>
-                <a:ahLst/>
-                <a:cxnLst/>
-                <a:rect r="r" b="b" t="t" l="l"/>
-                <a:pathLst>
-                  <a:path h="63226" w="540967">
-                    <a:moveTo>
-                      <a:pt x="11552" y="0"/>
-                    </a:moveTo>
-                    <a:lnTo>
-                      <a:pt x="529415" y="0"/>
-                    </a:lnTo>
-                    <a:cubicBezTo>
-                      <a:pt x="532478" y="0"/>
-                      <a:pt x="535417" y="1217"/>
-                      <a:pt x="537583" y="3384"/>
-                    </a:cubicBezTo>
-                    <a:cubicBezTo>
-                      <a:pt x="539750" y="5550"/>
-                      <a:pt x="540967" y="8488"/>
-                      <a:pt x="540967" y="11552"/>
-                    </a:cubicBezTo>
-                    <a:lnTo>
-                      <a:pt x="540967" y="51674"/>
-                    </a:lnTo>
-                    <a:cubicBezTo>
-                      <a:pt x="540967" y="58054"/>
-                      <a:pt x="535795" y="63226"/>
-                      <a:pt x="529415" y="63226"/>
-                    </a:cubicBezTo>
-                    <a:lnTo>
-                      <a:pt x="11552" y="63226"/>
-                    </a:lnTo>
-                    <a:cubicBezTo>
-                      <a:pt x="8488" y="63226"/>
-                      <a:pt x="5550" y="62009"/>
-                      <a:pt x="3384" y="59842"/>
-                    </a:cubicBezTo>
-                    <a:cubicBezTo>
-                      <a:pt x="1217" y="57676"/>
-                      <a:pt x="0" y="54737"/>
-                      <a:pt x="0" y="51674"/>
-                    </a:cubicBezTo>
-                    <a:lnTo>
-                      <a:pt x="0" y="11552"/>
-                    </a:lnTo>
-                    <a:cubicBezTo>
-                      <a:pt x="0" y="5172"/>
-                      <a:pt x="5172" y="0"/>
-                      <a:pt x="11552" y="0"/>
-                    </a:cubicBezTo>
-                    <a:close/>
-                  </a:path>
-                </a:pathLst>
-              </a:custGeom>
-              <a:solidFill>
-                <a:srgbClr val="FFFFFF"/>
-              </a:solidFill>
-            </p:spPr>
-          </p:sp>
-          <p:sp>
-            <p:nvSpPr>
-              <p:cNvPr name="TextBox 14" id="14"/>
-              <p:cNvSpPr txBox="true"/>
-              <p:nvPr/>
-            </p:nvSpPr>
-            <p:spPr>
-              <a:xfrm>
-                <a:off x="0" y="-66675"/>
-                <a:ext cx="540967" cy="129901"/>
-              </a:xfrm>
-              <a:prstGeom prst="rect">
-                <a:avLst/>
-              </a:prstGeom>
-            </p:spPr>
-            <p:txBody>
-              <a:bodyPr anchor="ctr" rtlCol="false" tIns="50800" lIns="50800" bIns="50800" rIns="50800"/>
-              <a:lstStyle/>
-              <a:p>
-                <a:pPr algn="ctr">
-                  <a:lnSpc>
-                    <a:spcPts val="2698"/>
-                  </a:lnSpc>
-                </a:pPr>
-              </a:p>
-            </p:txBody>
-          </p:sp>
-        </p:grpSp>
-        <p:sp>
-          <p:nvSpPr>
-            <p:cNvPr name="TextBox 15" id="15"/>
-            <p:cNvSpPr txBox="true"/>
-            <p:nvPr/>
-          </p:nvSpPr>
-          <p:spPr>
-            <a:xfrm rot="0">
-              <a:off x="8739424" y="358053"/>
-              <a:ext cx="10370445" cy="1294421"/>
-            </a:xfrm>
-            <a:prstGeom prst="rect">
-              <a:avLst/>
-            </a:prstGeom>
-          </p:spPr>
-          <p:txBody>
-            <a:bodyPr anchor="t" rtlCol="false" tIns="0" lIns="0" bIns="0" rIns="0">
-              <a:spAutoFit/>
-            </a:bodyPr>
-            <a:lstStyle/>
-            <a:p>
-              <a:pPr algn="ctr">
-                <a:lnSpc>
-                  <a:spcPts val="3813"/>
-                </a:lnSpc>
-              </a:pPr>
-              <a:r>
-                <a:rPr lang="en-US" sz="3345">
-                  <a:solidFill>
-                    <a:srgbClr val="000000"/>
-                  </a:solidFill>
-                  <a:latin typeface="Intro Rust"/>
-                  <a:ea typeface="Intro Rust"/>
-                  <a:cs typeface="Intro Rust"/>
-                  <a:sym typeface="Intro Rust"/>
-                </a:rPr>
-                <a:t>Solution Architecture &amp;</a:t>
-              </a:r>
-            </a:p>
-            <a:p>
-              <a:pPr algn="ctr">
-                <a:lnSpc>
-                  <a:spcPts val="3813"/>
-                </a:lnSpc>
-              </a:pPr>
-              <a:r>
-                <a:rPr lang="en-US" sz="3345">
-                  <a:solidFill>
-                    <a:srgbClr val="000000"/>
-                  </a:solidFill>
-                  <a:latin typeface="Intro Rust"/>
-                  <a:ea typeface="Intro Rust"/>
-                  <a:cs typeface="Intro Rust"/>
-                  <a:sym typeface="Intro Rust"/>
-                </a:rPr>
-                <a:t> Logical Flow</a:t>
-              </a:r>
-            </a:p>
-          </p:txBody>
-        </p:sp>
-      </p:grpSp>
-      <p:sp>
-        <p:nvSpPr>
-          <p:cNvPr name="TextBox 16" id="16"/>
-          <p:cNvSpPr txBox="true"/>
-          <p:nvPr/>
-        </p:nvSpPr>
-        <p:spPr>
-          <a:xfrm rot="0">
-            <a:off x="780843" y="2220376"/>
-            <a:ext cx="17507157" cy="1991994"/>
-          </a:xfrm>
-          <a:prstGeom prst="rect">
-            <a:avLst/>
-          </a:prstGeom>
-        </p:spPr>
-        <p:txBody>
-          <a:bodyPr anchor="t" rtlCol="false" tIns="0" lIns="0" bIns="0" rIns="0">
-            <a:spAutoFit/>
-          </a:bodyPr>
-          <a:lstStyle/>
-          <a:p>
-            <a:pPr algn="l" marL="798838" indent="-399419" lvl="1">
-              <a:lnSpc>
-                <a:spcPts val="5180"/>
-              </a:lnSpc>
-              <a:buFont typeface="Arial"/>
-              <a:buChar char="•"/>
-            </a:pPr>
-            <a:r>
-              <a:rPr lang="en-US" sz="3700">
-                <a:solidFill>
-                  <a:srgbClr val="000000"/>
-                </a:solidFill>
-                <a:latin typeface="Poppins"/>
-                <a:ea typeface="Poppins"/>
-                <a:cs typeface="Poppins"/>
-                <a:sym typeface="Poppins"/>
-              </a:rPr>
-              <a:t>How the system works,</a:t>
-            </a:r>
-            <a:r>
-              <a:rPr lang="en-US" sz="3700">
-                <a:solidFill>
-                  <a:srgbClr val="000000"/>
-                </a:solidFill>
-                <a:latin typeface="Poppins"/>
-                <a:ea typeface="Poppins"/>
-                <a:cs typeface="Poppins"/>
-                <a:sym typeface="Poppins"/>
-              </a:rPr>
-              <a:t> workflow diagram, interaction between components (AI/IoT/Blockchain etc.).</a:t>
-            </a:r>
-          </a:p>
-          <a:p>
-            <a:pPr algn="l">
-              <a:lnSpc>
-                <a:spcPts val="5180"/>
-              </a:lnSpc>
-            </a:pPr>
-          </a:p>
-        </p:txBody>
-      </p:sp>
-    </p:spTree>
-  </p:cSld>
-  <p:clrMapOvr>
-    <a:masterClrMapping/>
-  </p:clrMapOvr>
-</p:sld>
-</file>
-
-<file path=ppt/slides/slide5.xml><?xml version="1.0" encoding="utf-8"?>
-<p:sld xmlns:p="http://schemas.openxmlformats.org/presentationml/2006/main" xmlns:a="http://schemas.openxmlformats.org/drawingml/2006/main" xmlns:r="http://schemas.openxmlformats.org/officeDocument/2006/relationships">
-  <p:cSld>
-    <p:bg>
-      <p:bgPr>
-        <a:solidFill>
-          <a:srgbClr val="DFF5BB"/>
-        </a:solidFill>
-      </p:bgPr>
-    </p:bg>
-    <p:spTree>
-      <p:nvGrpSpPr>
-        <p:cNvPr id="1" name=""/>
-        <p:cNvGrpSpPr/>
-        <p:nvPr/>
-      </p:nvGrpSpPr>
-      <p:grpSpPr>
-        <a:xfrm>
-          <a:off x="0" y="0"/>
-          <a:ext cx="0" cy="0"/>
-          <a:chOff x="0" y="0"/>
-          <a:chExt cx="0" cy="0"/>
-        </a:xfrm>
-      </p:grpSpPr>
-      <p:grpSp>
-        <p:nvGrpSpPr>
-          <p:cNvPr name="Group 2" id="2"/>
-          <p:cNvGrpSpPr/>
-          <p:nvPr/>
-        </p:nvGrpSpPr>
-        <p:grpSpPr>
-          <a:xfrm rot="0">
-            <a:off x="579746" y="1572245"/>
-            <a:ext cx="17128507" cy="8308731"/>
-            <a:chOff x="0" y="0"/>
-            <a:chExt cx="842733" cy="408795"/>
-          </a:xfrm>
-        </p:grpSpPr>
-        <p:sp>
-          <p:nvSpPr>
-            <p:cNvPr name="Freeform 3" id="3"/>
-            <p:cNvSpPr/>
-            <p:nvPr/>
-          </p:nvSpPr>
-          <p:spPr>
-            <a:xfrm flipH="false" flipV="false" rot="0">
-              <a:off x="0" y="0"/>
-              <a:ext cx="842733" cy="408795"/>
-            </a:xfrm>
-            <a:custGeom>
-              <a:avLst/>
-              <a:gdLst/>
-              <a:ahLst/>
-              <a:cxnLst/>
-              <a:rect r="r" b="b" t="t" l="l"/>
-              <a:pathLst>
-                <a:path h="408795" w="842733">
-                  <a:moveTo>
-                    <a:pt x="20834" y="0"/>
-                  </a:moveTo>
-                  <a:lnTo>
-                    <a:pt x="821899" y="0"/>
-                  </a:lnTo>
-                  <a:cubicBezTo>
-                    <a:pt x="833405" y="0"/>
-                    <a:pt x="842733" y="9328"/>
-                    <a:pt x="842733" y="20834"/>
-                  </a:cubicBezTo>
-                  <a:lnTo>
-                    <a:pt x="842733" y="387961"/>
-                  </a:lnTo>
-                  <a:cubicBezTo>
-                    <a:pt x="842733" y="393486"/>
-                    <a:pt x="840538" y="398785"/>
-                    <a:pt x="836631" y="402692"/>
-                  </a:cubicBezTo>
-                  <a:cubicBezTo>
-                    <a:pt x="832724" y="406600"/>
-                    <a:pt x="827424" y="408795"/>
-                    <a:pt x="821899" y="408795"/>
-                  </a:cubicBezTo>
-                  <a:lnTo>
-                    <a:pt x="20834" y="408795"/>
-                  </a:lnTo>
-                  <a:cubicBezTo>
-                    <a:pt x="9328" y="408795"/>
-                    <a:pt x="0" y="399467"/>
-                    <a:pt x="0" y="387961"/>
-                  </a:cubicBezTo>
-                  <a:lnTo>
-                    <a:pt x="0" y="20834"/>
-                  </a:lnTo>
-                  <a:cubicBezTo>
-                    <a:pt x="0" y="9328"/>
-                    <a:pt x="9328" y="0"/>
-                    <a:pt x="20834" y="0"/>
-                  </a:cubicBezTo>
-                  <a:close/>
-                </a:path>
-              </a:pathLst>
-            </a:custGeom>
-            <a:solidFill>
-              <a:srgbClr val="FFFFFF"/>
-            </a:solidFill>
-          </p:spPr>
-        </p:sp>
-        <p:sp>
-          <p:nvSpPr>
-            <p:cNvPr name="TextBox 4" id="4"/>
-            <p:cNvSpPr txBox="true"/>
-            <p:nvPr/>
-          </p:nvSpPr>
-          <p:spPr>
-            <a:xfrm>
-              <a:off x="0" y="-66675"/>
-              <a:ext cx="842733" cy="475470"/>
-            </a:xfrm>
-            <a:prstGeom prst="rect">
-              <a:avLst/>
-            </a:prstGeom>
-          </p:spPr>
-          <p:txBody>
-            <a:bodyPr anchor="ctr" rtlCol="false" tIns="50800" lIns="50800" bIns="50800" rIns="50800"/>
-            <a:lstStyle/>
-            <a:p>
-              <a:pPr algn="ctr">
-                <a:lnSpc>
-                  <a:spcPts val="2698"/>
-                </a:lnSpc>
-              </a:pPr>
-            </a:p>
-          </p:txBody>
-        </p:sp>
-      </p:grpSp>
-      <p:grpSp>
-        <p:nvGrpSpPr>
-          <p:cNvPr name="Group 5" id="5"/>
-          <p:cNvGrpSpPr/>
-          <p:nvPr/>
-        </p:nvGrpSpPr>
-        <p:grpSpPr>
-          <a:xfrm rot="0">
-            <a:off x="7005717" y="3254154"/>
-            <a:ext cx="4276565" cy="3778691"/>
-            <a:chOff x="0" y="0"/>
-            <a:chExt cx="5702087" cy="5038255"/>
-          </a:xfrm>
-        </p:grpSpPr>
-        <p:sp>
-          <p:nvSpPr>
-            <p:cNvPr name="Freeform 6" id="6"/>
-            <p:cNvSpPr/>
-            <p:nvPr/>
-          </p:nvSpPr>
-          <p:spPr>
-            <a:xfrm flipH="false" flipV="false" rot="0">
-              <a:off x="420319" y="0"/>
-              <a:ext cx="4861448" cy="4004822"/>
-            </a:xfrm>
-            <a:custGeom>
-              <a:avLst/>
-              <a:gdLst/>
-              <a:ahLst/>
-              <a:cxnLst/>
-              <a:rect r="r" b="b" t="t" l="l"/>
-              <a:pathLst>
-                <a:path h="4004822" w="4861448">
-                  <a:moveTo>
-                    <a:pt x="0" y="0"/>
-                  </a:moveTo>
-                  <a:lnTo>
-                    <a:pt x="4861449" y="0"/>
-                  </a:lnTo>
-                  <a:lnTo>
-                    <a:pt x="4861449" y="4004822"/>
-                  </a:lnTo>
-                  <a:lnTo>
-                    <a:pt x="0" y="4004822"/>
-                  </a:lnTo>
-                  <a:lnTo>
-                    <a:pt x="0" y="0"/>
-                  </a:lnTo>
-                  <a:close/>
-                </a:path>
-              </a:pathLst>
-            </a:custGeom>
-            <a:blipFill>
-              <a:blip r:embed="rId2">
-                <a:alphaModFix amt="17000"/>
-              </a:blip>
-              <a:stretch>
-                <a:fillRect l="-11082" t="-31562" r="-6294" b="-82297"/>
-              </a:stretch>
-            </a:blipFill>
-          </p:spPr>
-        </p:sp>
-        <p:sp>
-          <p:nvSpPr>
-            <p:cNvPr name="Freeform 7" id="7"/>
-            <p:cNvSpPr/>
-            <p:nvPr/>
-          </p:nvSpPr>
-          <p:spPr>
-            <a:xfrm flipH="false" flipV="false" rot="0">
-              <a:off x="0" y="4314679"/>
-              <a:ext cx="5702087" cy="723576"/>
-            </a:xfrm>
-            <a:custGeom>
-              <a:avLst/>
-              <a:gdLst/>
-              <a:ahLst/>
-              <a:cxnLst/>
-              <a:rect r="r" b="b" t="t" l="l"/>
-              <a:pathLst>
-                <a:path h="723576" w="5702087">
-                  <a:moveTo>
-                    <a:pt x="0" y="0"/>
-                  </a:moveTo>
-                  <a:lnTo>
-                    <a:pt x="5702087" y="0"/>
-                  </a:lnTo>
-                  <a:lnTo>
-                    <a:pt x="5702087" y="723576"/>
-                  </a:lnTo>
-                  <a:lnTo>
-                    <a:pt x="0" y="723576"/>
-                  </a:lnTo>
-                  <a:lnTo>
-                    <a:pt x="0" y="0"/>
-                  </a:lnTo>
-                  <a:close/>
-                </a:path>
-              </a:pathLst>
-            </a:custGeom>
-            <a:blipFill>
-              <a:blip r:embed="rId3">
-                <a:alphaModFix amt="17000"/>
-              </a:blip>
-              <a:stretch>
-                <a:fillRect l="-2499" t="-762883" r="0" b="-349482"/>
-              </a:stretch>
-            </a:blipFill>
-          </p:spPr>
-        </p:sp>
-      </p:grpSp>
-      <p:sp>
-        <p:nvSpPr>
-          <p:cNvPr name="Freeform 8" id="8"/>
-          <p:cNvSpPr/>
-          <p:nvPr/>
-        </p:nvSpPr>
-        <p:spPr>
-          <a:xfrm flipH="false" flipV="false" rot="0">
-            <a:off x="16686012" y="287186"/>
-            <a:ext cx="1062335" cy="1076626"/>
-          </a:xfrm>
-          <a:custGeom>
-            <a:avLst/>
-            <a:gdLst/>
-            <a:ahLst/>
-            <a:cxnLst/>
-            <a:rect r="r" b="b" t="t" l="l"/>
-            <a:pathLst>
-              <a:path h="1076626" w="1062335">
-                <a:moveTo>
-                  <a:pt x="0" y="0"/>
-                </a:moveTo>
-                <a:lnTo>
-                  <a:pt x="1062334" y="0"/>
-                </a:lnTo>
-                <a:lnTo>
-                  <a:pt x="1062334" y="1076627"/>
-                </a:lnTo>
-                <a:lnTo>
-                  <a:pt x="0" y="1076627"/>
-                </a:lnTo>
-                <a:lnTo>
-                  <a:pt x="0" y="0"/>
-                </a:lnTo>
-                <a:close/>
-              </a:path>
-            </a:pathLst>
-          </a:custGeom>
-          <a:blipFill>
-            <a:blip r:embed="rId4"/>
-            <a:stretch>
-              <a:fillRect l="0" t="0" r="0" b="0"/>
-            </a:stretch>
-          </a:blipFill>
-        </p:spPr>
-      </p:sp>
-      <p:grpSp>
-        <p:nvGrpSpPr>
-          <p:cNvPr name="Group 9" id="9"/>
-          <p:cNvGrpSpPr/>
-          <p:nvPr/>
-        </p:nvGrpSpPr>
-        <p:grpSpPr>
-          <a:xfrm rot="0">
-            <a:off x="486373" y="213427"/>
-            <a:ext cx="15806860" cy="1285059"/>
-            <a:chOff x="0" y="0"/>
-            <a:chExt cx="21075813" cy="1713411"/>
-          </a:xfrm>
-        </p:grpSpPr>
-        <p:sp>
-          <p:nvSpPr>
-            <p:cNvPr name="Freeform 10" id="10"/>
-            <p:cNvSpPr/>
-            <p:nvPr/>
-          </p:nvSpPr>
-          <p:spPr>
-            <a:xfrm flipH="false" flipV="false" rot="0">
-              <a:off x="0" y="98345"/>
-              <a:ext cx="6051549" cy="1542121"/>
-            </a:xfrm>
-            <a:custGeom>
-              <a:avLst/>
-              <a:gdLst/>
-              <a:ahLst/>
-              <a:cxnLst/>
-              <a:rect r="r" b="b" t="t" l="l"/>
-              <a:pathLst>
-                <a:path h="1542121" w="6051549">
-                  <a:moveTo>
-                    <a:pt x="0" y="0"/>
-                  </a:moveTo>
-                  <a:lnTo>
-                    <a:pt x="6051549" y="0"/>
-                  </a:lnTo>
-                  <a:lnTo>
-                    <a:pt x="6051549" y="1542121"/>
-                  </a:lnTo>
-                  <a:lnTo>
-                    <a:pt x="0" y="1542121"/>
-                  </a:lnTo>
-                  <a:lnTo>
-                    <a:pt x="0" y="0"/>
-                  </a:lnTo>
-                  <a:close/>
-                </a:path>
-              </a:pathLst>
-            </a:custGeom>
-            <a:blipFill>
-              <a:blip r:embed="rId5">
-                <a:extLst>
-                  <a:ext uri="{96DAC541-7B7A-43D3-8B79-37D633B846F1}">
-                    <asvg:svgBlip xmlns:asvg="http://schemas.microsoft.com/office/drawing/2016/SVG/main" r:embed="rId6"/>
-                  </a:ext>
-                </a:extLst>
-              </a:blip>
-              <a:stretch>
-                <a:fillRect l="0" t="0" r="0" b="0"/>
-              </a:stretch>
-            </a:blipFill>
-          </p:spPr>
-        </p:sp>
-        <p:sp>
-          <p:nvSpPr>
-            <p:cNvPr name="TextBox 11" id="11"/>
-            <p:cNvSpPr txBox="true"/>
-            <p:nvPr/>
-          </p:nvSpPr>
-          <p:spPr>
-            <a:xfrm rot="0">
-              <a:off x="392627" y="342178"/>
-              <a:ext cx="2003298" cy="952652"/>
-            </a:xfrm>
-            <a:prstGeom prst="rect">
-              <a:avLst/>
-            </a:prstGeom>
-          </p:spPr>
-          <p:txBody>
-            <a:bodyPr anchor="t" rtlCol="false" tIns="0" lIns="0" bIns="0" rIns="0">
-              <a:spAutoFit/>
-            </a:bodyPr>
-            <a:lstStyle/>
-            <a:p>
-              <a:pPr algn="ctr">
-                <a:lnSpc>
-                  <a:spcPts val="2880"/>
-                </a:lnSpc>
-              </a:pPr>
-              <a:r>
-                <a:rPr lang="en-US" sz="2057" b="true">
-                  <a:solidFill>
-                    <a:srgbClr val="000000"/>
-                  </a:solidFill>
-                  <a:latin typeface="Poppins Bold"/>
-                  <a:ea typeface="Poppins Bold"/>
-                  <a:cs typeface="Poppins Bold"/>
-                  <a:sym typeface="Poppins Bold"/>
-                </a:rPr>
-                <a:t>TEAM NAME</a:t>
-              </a:r>
-            </a:p>
-          </p:txBody>
-        </p:sp>
-        <p:grpSp>
-          <p:nvGrpSpPr>
-            <p:cNvPr name="Group 12" id="12"/>
-            <p:cNvGrpSpPr/>
-            <p:nvPr/>
-          </p:nvGrpSpPr>
-          <p:grpSpPr>
-            <a:xfrm rot="0">
-              <a:off x="6415652" y="0"/>
-              <a:ext cx="14660161" cy="1713411"/>
-              <a:chOff x="0" y="0"/>
-              <a:chExt cx="540967" cy="63226"/>
-            </a:xfrm>
-          </p:grpSpPr>
-          <p:sp>
-            <p:nvSpPr>
-              <p:cNvPr name="Freeform 13" id="13"/>
-              <p:cNvSpPr/>
-              <p:nvPr/>
-            </p:nvSpPr>
-            <p:spPr>
-              <a:xfrm flipH="false" flipV="false" rot="0">
-                <a:off x="0" y="0"/>
-                <a:ext cx="540967" cy="63226"/>
-              </a:xfrm>
-              <a:custGeom>
-                <a:avLst/>
-                <a:gdLst/>
-                <a:ahLst/>
-                <a:cxnLst/>
-                <a:rect r="r" b="b" t="t" l="l"/>
-                <a:pathLst>
-                  <a:path h="63226" w="540967">
-                    <a:moveTo>
-                      <a:pt x="11552" y="0"/>
-                    </a:moveTo>
-                    <a:lnTo>
-                      <a:pt x="529415" y="0"/>
-                    </a:lnTo>
-                    <a:cubicBezTo>
-                      <a:pt x="532478" y="0"/>
-                      <a:pt x="535417" y="1217"/>
-                      <a:pt x="537583" y="3384"/>
-                    </a:cubicBezTo>
-                    <a:cubicBezTo>
-                      <a:pt x="539750" y="5550"/>
-                      <a:pt x="540967" y="8488"/>
-                      <a:pt x="540967" y="11552"/>
-                    </a:cubicBezTo>
-                    <a:lnTo>
-                      <a:pt x="540967" y="51674"/>
-                    </a:lnTo>
-                    <a:cubicBezTo>
-                      <a:pt x="540967" y="58054"/>
-                      <a:pt x="535795" y="63226"/>
-                      <a:pt x="529415" y="63226"/>
-                    </a:cubicBezTo>
-                    <a:lnTo>
-                      <a:pt x="11552" y="63226"/>
-                    </a:lnTo>
-                    <a:cubicBezTo>
-                      <a:pt x="8488" y="63226"/>
-                      <a:pt x="5550" y="62009"/>
-                      <a:pt x="3384" y="59842"/>
-                    </a:cubicBezTo>
-                    <a:cubicBezTo>
-                      <a:pt x="1217" y="57676"/>
-                      <a:pt x="0" y="54737"/>
-                      <a:pt x="0" y="51674"/>
-                    </a:cubicBezTo>
-                    <a:lnTo>
-                      <a:pt x="0" y="11552"/>
-                    </a:lnTo>
-                    <a:cubicBezTo>
-                      <a:pt x="0" y="5172"/>
-                      <a:pt x="5172" y="0"/>
-                      <a:pt x="11552" y="0"/>
-                    </a:cubicBezTo>
-                    <a:close/>
-                  </a:path>
-                </a:pathLst>
-              </a:custGeom>
-              <a:solidFill>
-                <a:srgbClr val="FFFFFF"/>
-              </a:solidFill>
-            </p:spPr>
-          </p:sp>
-          <p:sp>
-            <p:nvSpPr>
-              <p:cNvPr name="TextBox 14" id="14"/>
-              <p:cNvSpPr txBox="true"/>
-              <p:nvPr/>
-            </p:nvSpPr>
-            <p:spPr>
-              <a:xfrm>
-                <a:off x="0" y="-66675"/>
-                <a:ext cx="540967" cy="129901"/>
-              </a:xfrm>
-              <a:prstGeom prst="rect">
-                <a:avLst/>
-              </a:prstGeom>
-            </p:spPr>
-            <p:txBody>
-              <a:bodyPr anchor="ctr" rtlCol="false" tIns="50800" lIns="50800" bIns="50800" rIns="50800"/>
-              <a:lstStyle/>
-              <a:p>
-                <a:pPr algn="ctr">
-                  <a:lnSpc>
-                    <a:spcPts val="2698"/>
-                  </a:lnSpc>
-                </a:pPr>
-              </a:p>
-            </p:txBody>
-          </p:sp>
-        </p:grpSp>
-        <p:sp>
-          <p:nvSpPr>
-            <p:cNvPr name="TextBox 15" id="15"/>
-            <p:cNvSpPr txBox="true"/>
-            <p:nvPr/>
-          </p:nvSpPr>
-          <p:spPr>
-            <a:xfrm rot="0">
-              <a:off x="6876342" y="443638"/>
-              <a:ext cx="13656072" cy="796649"/>
-            </a:xfrm>
-            <a:prstGeom prst="rect">
-              <a:avLst/>
-            </a:prstGeom>
-          </p:spPr>
-          <p:txBody>
-            <a:bodyPr anchor="t" rtlCol="false" tIns="0" lIns="0" bIns="0" rIns="0">
-              <a:spAutoFit/>
-            </a:bodyPr>
-            <a:lstStyle/>
-            <a:p>
-              <a:pPr algn="ctr">
-                <a:lnSpc>
-                  <a:spcPts val="4612"/>
-                </a:lnSpc>
-              </a:pPr>
-              <a:r>
-                <a:rPr lang="en-US" sz="4045">
-                  <a:solidFill>
-                    <a:srgbClr val="000000"/>
-                  </a:solidFill>
-                  <a:latin typeface="Intro Rust"/>
-                  <a:ea typeface="Intro Rust"/>
-                  <a:cs typeface="Intro Rust"/>
-                  <a:sym typeface="Intro Rust"/>
-                </a:rPr>
-                <a:t>Technology Stack &amp;</a:t>
-              </a:r>
-              <a:r>
-                <a:rPr lang="en-US" sz="4045">
-                  <a:solidFill>
-                    <a:srgbClr val="000000"/>
-                  </a:solidFill>
-                  <a:latin typeface="Intro Rust"/>
-                  <a:ea typeface="Intro Rust"/>
-                  <a:cs typeface="Intro Rust"/>
-                  <a:sym typeface="Intro Rust"/>
-                </a:rPr>
-                <a:t> Data Strategy</a:t>
-              </a:r>
-            </a:p>
-          </p:txBody>
-        </p:sp>
-      </p:grpSp>
-      <p:sp>
-        <p:nvSpPr>
-          <p:cNvPr name="TextBox 16" id="16"/>
-          <p:cNvSpPr txBox="true"/>
-          <p:nvPr/>
-        </p:nvSpPr>
-        <p:spPr>
-          <a:xfrm rot="0">
-            <a:off x="780843" y="2220376"/>
-            <a:ext cx="12265819" cy="1334769"/>
-          </a:xfrm>
-          <a:prstGeom prst="rect">
-            <a:avLst/>
-          </a:prstGeom>
-        </p:spPr>
-        <p:txBody>
-          <a:bodyPr anchor="t" rtlCol="false" tIns="0" lIns="0" bIns="0" rIns="0">
-            <a:spAutoFit/>
-          </a:bodyPr>
-          <a:lstStyle/>
-          <a:p>
-            <a:pPr algn="l" marL="798838" indent="-399419" lvl="1">
-              <a:lnSpc>
-                <a:spcPts val="5180"/>
-              </a:lnSpc>
-              <a:buFont typeface="Arial"/>
-              <a:buChar char="•"/>
-            </a:pPr>
-            <a:r>
-              <a:rPr lang="en-US" sz="3700">
-                <a:solidFill>
-                  <a:srgbClr val="000000"/>
-                </a:solidFill>
-                <a:latin typeface="Poppins"/>
-                <a:ea typeface="Poppins"/>
-                <a:cs typeface="Poppins"/>
-                <a:sym typeface="Poppins"/>
-              </a:rPr>
-              <a:t>Are the technologies</a:t>
-            </a:r>
-            <a:r>
-              <a:rPr lang="en-US" sz="3700">
-                <a:solidFill>
-                  <a:srgbClr val="000000"/>
-                </a:solidFill>
-                <a:latin typeface="Poppins"/>
-                <a:ea typeface="Poppins"/>
-                <a:cs typeface="Poppins"/>
-                <a:sym typeface="Poppins"/>
-              </a:rPr>
-              <a:t> appropriate? </a:t>
-            </a:r>
-          </a:p>
-          <a:p>
-            <a:pPr algn="l" marL="798838" indent="-399419" lvl="1">
-              <a:lnSpc>
-                <a:spcPts val="5180"/>
-              </a:lnSpc>
-              <a:buFont typeface="Arial"/>
-              <a:buChar char="•"/>
-            </a:pPr>
-            <a:r>
-              <a:rPr lang="en-US" sz="3700">
-                <a:solidFill>
-                  <a:srgbClr val="000000"/>
-                </a:solidFill>
-                <a:latin typeface="Poppins"/>
-                <a:ea typeface="Poppins"/>
-                <a:cs typeface="Poppins"/>
-                <a:sym typeface="Poppins"/>
-              </a:rPr>
-              <a:t>How will data, APIs, sensors, or datasets be used?</a:t>
-            </a:r>
-          </a:p>
-        </p:txBody>
-      </p:sp>
-    </p:spTree>
-  </p:cSld>
-  <p:clrMapOvr>
-    <a:masterClrMapping/>
-  </p:clrMapOvr>
-</p:sld>
-</file>
-
-<file path=ppt/slides/slide6.xml><?xml version="1.0" encoding="utf-8"?>
 <p:sld xmlns:p="http://schemas.openxmlformats.org/presentationml/2006/main" xmlns:a="http://schemas.openxmlformats.org/drawingml/2006/main" xmlns:r="http://schemas.openxmlformats.org/officeDocument/2006/relationships">
   <p:cSld>
     <p:bg>
@@ -6930,82 +5457,6 @@
           </p:txBody>
         </p:sp>
       </p:grpSp>
-      <p:sp>
-        <p:nvSpPr>
-          <p:cNvPr name="TextBox 16" id="16"/>
-          <p:cNvSpPr txBox="true"/>
-          <p:nvPr/>
-        </p:nvSpPr>
-        <p:spPr>
-          <a:xfrm rot="0">
-            <a:off x="780843" y="2220376"/>
-            <a:ext cx="8734524" cy="1334769"/>
-          </a:xfrm>
-          <a:prstGeom prst="rect">
-            <a:avLst/>
-          </a:prstGeom>
-        </p:spPr>
-        <p:txBody>
-          <a:bodyPr anchor="t" rtlCol="false" tIns="0" lIns="0" bIns="0" rIns="0">
-            <a:spAutoFit/>
-          </a:bodyPr>
-          <a:lstStyle/>
-          <a:p>
-            <a:pPr algn="l" marL="798838" indent="-399419" lvl="1">
-              <a:lnSpc>
-                <a:spcPts val="5180"/>
-              </a:lnSpc>
-              <a:buFont typeface="Arial"/>
-              <a:buChar char="•"/>
-            </a:pPr>
-            <a:r>
-              <a:rPr lang="en-US" sz="3700">
-                <a:solidFill>
-                  <a:srgbClr val="000000"/>
-                </a:solidFill>
-                <a:latin typeface="Poppins"/>
-                <a:ea typeface="Poppins"/>
-                <a:cs typeface="Poppins"/>
-                <a:sym typeface="Poppins"/>
-              </a:rPr>
-              <a:t>Can the ide</a:t>
-            </a:r>
-            <a:r>
-              <a:rPr lang="en-US" sz="3700">
-                <a:solidFill>
-                  <a:srgbClr val="000000"/>
-                </a:solidFill>
-                <a:latin typeface="Poppins"/>
-                <a:ea typeface="Poppins"/>
-                <a:cs typeface="Poppins"/>
-                <a:sym typeface="Poppins"/>
-              </a:rPr>
-              <a:t>a realistically be built?</a:t>
-            </a:r>
-          </a:p>
-          <a:p>
-            <a:pPr algn="l" marL="798838" indent="-399419" lvl="1">
-              <a:lnSpc>
-                <a:spcPts val="5180"/>
-              </a:lnSpc>
-              <a:buFont typeface="Arial"/>
-              <a:buChar char="•"/>
-            </a:pPr>
-            <a:r>
-              <a:rPr lang="en-US" sz="3700">
-                <a:solidFill>
-                  <a:srgbClr val="000000"/>
-                </a:solidFill>
-                <a:latin typeface="Poppins"/>
-                <a:ea typeface="Poppins"/>
-                <a:cs typeface="Poppins"/>
-                <a:sym typeface="Poppins"/>
-              </a:rPr>
-              <a:t> Can it scale in real-world use?</a:t>
-            </a:r>
-          </a:p>
-        </p:txBody>
-      </p:sp>
     </p:spTree>
   </p:cSld>
   <p:clrMapOvr>
@@ -7014,7 +5465,7 @@
 </p:sld>
 </file>
 
-<file path=ppt/slides/slide7.xml><?xml version="1.0" encoding="utf-8"?>
+<file path=ppt/slides/slide5.xml><?xml version="1.0" encoding="utf-8"?>
 <p:sld xmlns:p="http://schemas.openxmlformats.org/presentationml/2006/main" xmlns:a="http://schemas.openxmlformats.org/drawingml/2006/main" xmlns:r="http://schemas.openxmlformats.org/officeDocument/2006/relationships">
   <p:cSld>
     <p:bg>
@@ -7148,9 +5599,120 @@
           </p:txBody>
         </p:sp>
       </p:grpSp>
-      <p:sp>
-        <p:nvSpPr>
-          <p:cNvPr name="Freeform 5" id="5"/>
+      <p:grpSp>
+        <p:nvGrpSpPr>
+          <p:cNvPr name="Group 5" id="5"/>
+          <p:cNvGrpSpPr/>
+          <p:nvPr/>
+        </p:nvGrpSpPr>
+        <p:grpSpPr>
+          <a:xfrm rot="0">
+            <a:off x="7005717" y="3254154"/>
+            <a:ext cx="4276565" cy="3778691"/>
+            <a:chOff x="0" y="0"/>
+            <a:chExt cx="5702087" cy="5038255"/>
+          </a:xfrm>
+        </p:grpSpPr>
+        <p:sp>
+          <p:nvSpPr>
+            <p:cNvPr name="Freeform 6" id="6"/>
+            <p:cNvSpPr/>
+            <p:nvPr/>
+          </p:nvSpPr>
+          <p:spPr>
+            <a:xfrm flipH="false" flipV="false" rot="0">
+              <a:off x="420319" y="0"/>
+              <a:ext cx="4861448" cy="4004822"/>
+            </a:xfrm>
+            <a:custGeom>
+              <a:avLst/>
+              <a:gdLst/>
+              <a:ahLst/>
+              <a:cxnLst/>
+              <a:rect r="r" b="b" t="t" l="l"/>
+              <a:pathLst>
+                <a:path h="4004822" w="4861448">
+                  <a:moveTo>
+                    <a:pt x="0" y="0"/>
+                  </a:moveTo>
+                  <a:lnTo>
+                    <a:pt x="4861449" y="0"/>
+                  </a:lnTo>
+                  <a:lnTo>
+                    <a:pt x="4861449" y="4004822"/>
+                  </a:lnTo>
+                  <a:lnTo>
+                    <a:pt x="0" y="4004822"/>
+                  </a:lnTo>
+                  <a:lnTo>
+                    <a:pt x="0" y="0"/>
+                  </a:lnTo>
+                  <a:close/>
+                </a:path>
+              </a:pathLst>
+            </a:custGeom>
+            <a:blipFill>
+              <a:blip r:embed="rId2">
+                <a:alphaModFix amt="17000"/>
+              </a:blip>
+              <a:stretch>
+                <a:fillRect l="-11082" t="-31562" r="-6294" b="-82297"/>
+              </a:stretch>
+            </a:blipFill>
+          </p:spPr>
+        </p:sp>
+        <p:sp>
+          <p:nvSpPr>
+            <p:cNvPr name="Freeform 7" id="7"/>
+            <p:cNvSpPr/>
+            <p:nvPr/>
+          </p:nvSpPr>
+          <p:spPr>
+            <a:xfrm flipH="false" flipV="false" rot="0">
+              <a:off x="0" y="4314679"/>
+              <a:ext cx="5702087" cy="723576"/>
+            </a:xfrm>
+            <a:custGeom>
+              <a:avLst/>
+              <a:gdLst/>
+              <a:ahLst/>
+              <a:cxnLst/>
+              <a:rect r="r" b="b" t="t" l="l"/>
+              <a:pathLst>
+                <a:path h="723576" w="5702087">
+                  <a:moveTo>
+                    <a:pt x="0" y="0"/>
+                  </a:moveTo>
+                  <a:lnTo>
+                    <a:pt x="5702087" y="0"/>
+                  </a:lnTo>
+                  <a:lnTo>
+                    <a:pt x="5702087" y="723576"/>
+                  </a:lnTo>
+                  <a:lnTo>
+                    <a:pt x="0" y="723576"/>
+                  </a:lnTo>
+                  <a:lnTo>
+                    <a:pt x="0" y="0"/>
+                  </a:lnTo>
+                  <a:close/>
+                </a:path>
+              </a:pathLst>
+            </a:custGeom>
+            <a:blipFill>
+              <a:blip r:embed="rId3">
+                <a:alphaModFix amt="17000"/>
+              </a:blip>
+              <a:stretch>
+                <a:fillRect l="-2499" t="-762883" r="0" b="-349482"/>
+              </a:stretch>
+            </a:blipFill>
+          </p:spPr>
+        </p:sp>
+      </p:grpSp>
+      <p:sp>
+        <p:nvSpPr>
+          <p:cNvPr name="Freeform 8" id="8"/>
           <p:cNvSpPr/>
           <p:nvPr/>
         </p:nvSpPr>
@@ -7187,7 +5749,7 @@
             </a:pathLst>
           </a:custGeom>
           <a:blipFill>
-            <a:blip r:embed="rId2"/>
+            <a:blip r:embed="rId4"/>
             <a:stretch>
               <a:fillRect l="0" t="0" r="0" b="0"/>
             </a:stretch>
@@ -7196,7 +5758,7 @@
       </p:sp>
       <p:grpSp>
         <p:nvGrpSpPr>
-          <p:cNvPr name="Group 6" id="6"/>
+          <p:cNvPr name="Group 9" id="9"/>
           <p:cNvGrpSpPr/>
           <p:nvPr/>
         </p:nvGrpSpPr>
@@ -7210,7 +5772,7 @@
         </p:grpSpPr>
         <p:sp>
           <p:nvSpPr>
-            <p:cNvPr name="Freeform 7" id="7"/>
+            <p:cNvPr name="Freeform 10" id="10"/>
             <p:cNvSpPr/>
             <p:nvPr/>
           </p:nvSpPr>
@@ -7247,10 +5809,10 @@
               </a:pathLst>
             </a:custGeom>
             <a:blipFill>
-              <a:blip r:embed="rId3">
+              <a:blip r:embed="rId5">
                 <a:extLst>
                   <a:ext uri="{96DAC541-7B7A-43D3-8B79-37D633B846F1}">
-                    <asvg:svgBlip xmlns:asvg="http://schemas.microsoft.com/office/drawing/2016/SVG/main" r:embed="rId4"/>
+                    <asvg:svgBlip xmlns:asvg="http://schemas.microsoft.com/office/drawing/2016/SVG/main" r:embed="rId6"/>
                   </a:ext>
                 </a:extLst>
               </a:blip>
@@ -7262,7 +5824,7 @@
         </p:sp>
         <p:sp>
           <p:nvSpPr>
-            <p:cNvPr name="TextBox 8" id="8"/>
+            <p:cNvPr name="TextBox 11" id="11"/>
             <p:cNvSpPr txBox="true"/>
             <p:nvPr/>
           </p:nvSpPr>
@@ -7303,7 +5865,7 @@
         </p:sp>
         <p:grpSp>
           <p:nvGrpSpPr>
-            <p:cNvPr name="Group 9" id="9"/>
+            <p:cNvPr name="Group 12" id="12"/>
             <p:cNvGrpSpPr/>
             <p:nvPr/>
           </p:nvGrpSpPr>
@@ -7317,7 +5879,7 @@
           </p:grpSpPr>
           <p:sp>
             <p:nvSpPr>
-              <p:cNvPr name="Freeform 10" id="10"/>
+              <p:cNvPr name="Freeform 13" id="13"/>
               <p:cNvSpPr/>
               <p:nvPr/>
             </p:nvSpPr>
@@ -7390,7 +5952,7 @@
           </p:sp>
           <p:sp>
             <p:nvSpPr>
-              <p:cNvPr name="TextBox 11" id="11"/>
+              <p:cNvPr name="TextBox 14" id="14"/>
               <p:cNvSpPr txBox="true"/>
               <p:nvPr/>
             </p:nvSpPr>
@@ -7418,14 +5980,14 @@
         </p:grpSp>
         <p:sp>
           <p:nvSpPr>
-            <p:cNvPr name="TextBox 12" id="12"/>
+            <p:cNvPr name="TextBox 15" id="15"/>
             <p:cNvSpPr txBox="true"/>
             <p:nvPr/>
           </p:nvSpPr>
           <p:spPr>
             <a:xfrm rot="0">
-              <a:off x="7844518" y="443638"/>
-              <a:ext cx="11719719" cy="943443"/>
+              <a:off x="8739424" y="367578"/>
+              <a:ext cx="10370445" cy="943443"/>
             </a:xfrm>
             <a:prstGeom prst="rect">
               <a:avLst/>
@@ -7452,188 +6014,10 @@
                   <a:cs typeface="Intro Rust"/>
                   <a:sym typeface="Intro Rust"/>
                 </a:rPr>
-                <a:t>PPT</a:t>
-              </a:r>
-              <a:r>
-                <a:rPr lang="en-US" sz="4745">
-                  <a:solidFill>
-                    <a:srgbClr val="000000"/>
-                  </a:solidFill>
-                  <a:latin typeface="Intro Rust"/>
-                  <a:ea typeface="Intro Rust"/>
-                  <a:cs typeface="Intro Rust"/>
-                  <a:sym typeface="Intro Rust"/>
-                </a:rPr>
-                <a:t> Quality &amp; Originality</a:t>
+                <a:t>tech stack</a:t>
               </a:r>
             </a:p>
           </p:txBody>
-        </p:sp>
-      </p:grpSp>
-      <p:sp>
-        <p:nvSpPr>
-          <p:cNvPr name="TextBox 13" id="13"/>
-          <p:cNvSpPr txBox="true"/>
-          <p:nvPr/>
-        </p:nvSpPr>
-        <p:spPr>
-          <a:xfrm rot="0">
-            <a:off x="780843" y="2220376"/>
-            <a:ext cx="13374787" cy="677544"/>
-          </a:xfrm>
-          <a:prstGeom prst="rect">
-            <a:avLst/>
-          </a:prstGeom>
-        </p:spPr>
-        <p:txBody>
-          <a:bodyPr anchor="t" rtlCol="false" tIns="0" lIns="0" bIns="0" rIns="0">
-            <a:spAutoFit/>
-          </a:bodyPr>
-          <a:lstStyle/>
-          <a:p>
-            <a:pPr algn="l" marL="798838" indent="-399419" lvl="1">
-              <a:lnSpc>
-                <a:spcPts val="5180"/>
-              </a:lnSpc>
-              <a:buFont typeface="Arial"/>
-              <a:buChar char="•"/>
-            </a:pPr>
-            <a:r>
-              <a:rPr lang="en-US" sz="3700">
-                <a:solidFill>
-                  <a:srgbClr val="000000"/>
-                </a:solidFill>
-                <a:latin typeface="Poppins"/>
-                <a:ea typeface="Poppins"/>
-                <a:cs typeface="Poppins"/>
-                <a:sym typeface="Poppins"/>
-              </a:rPr>
-              <a:t>Clear slides,</a:t>
-            </a:r>
-            <a:r>
-              <a:rPr lang="en-US" sz="3700">
-                <a:solidFill>
-                  <a:srgbClr val="000000"/>
-                </a:solidFill>
-                <a:latin typeface="Poppins"/>
-                <a:ea typeface="Poppins"/>
-                <a:cs typeface="Poppins"/>
-                <a:sym typeface="Poppins"/>
-              </a:rPr>
-              <a:t> diagrams, references, and no plagiarism.</a:t>
-            </a:r>
-          </a:p>
-        </p:txBody>
-      </p:sp>
-      <p:grpSp>
-        <p:nvGrpSpPr>
-          <p:cNvPr name="Group 14" id="14"/>
-          <p:cNvGrpSpPr/>
-          <p:nvPr/>
-        </p:nvGrpSpPr>
-        <p:grpSpPr>
-          <a:xfrm rot="0">
-            <a:off x="7005717" y="3254154"/>
-            <a:ext cx="4276565" cy="3778691"/>
-            <a:chOff x="0" y="0"/>
-            <a:chExt cx="5702087" cy="5038255"/>
-          </a:xfrm>
-        </p:grpSpPr>
-        <p:sp>
-          <p:nvSpPr>
-            <p:cNvPr name="Freeform 15" id="15"/>
-            <p:cNvSpPr/>
-            <p:nvPr/>
-          </p:nvSpPr>
-          <p:spPr>
-            <a:xfrm flipH="false" flipV="false" rot="0">
-              <a:off x="420319" y="0"/>
-              <a:ext cx="4861448" cy="4004822"/>
-            </a:xfrm>
-            <a:custGeom>
-              <a:avLst/>
-              <a:gdLst/>
-              <a:ahLst/>
-              <a:cxnLst/>
-              <a:rect r="r" b="b" t="t" l="l"/>
-              <a:pathLst>
-                <a:path h="4004822" w="4861448">
-                  <a:moveTo>
-                    <a:pt x="0" y="0"/>
-                  </a:moveTo>
-                  <a:lnTo>
-                    <a:pt x="4861449" y="0"/>
-                  </a:lnTo>
-                  <a:lnTo>
-                    <a:pt x="4861449" y="4004822"/>
-                  </a:lnTo>
-                  <a:lnTo>
-                    <a:pt x="0" y="4004822"/>
-                  </a:lnTo>
-                  <a:lnTo>
-                    <a:pt x="0" y="0"/>
-                  </a:lnTo>
-                  <a:close/>
-                </a:path>
-              </a:pathLst>
-            </a:custGeom>
-            <a:blipFill>
-              <a:blip r:embed="rId5">
-                <a:alphaModFix amt="17000"/>
-              </a:blip>
-              <a:stretch>
-                <a:fillRect l="-11082" t="-31562" r="-6294" b="-82297"/>
-              </a:stretch>
-            </a:blipFill>
-          </p:spPr>
-        </p:sp>
-        <p:sp>
-          <p:nvSpPr>
-            <p:cNvPr name="Freeform 16" id="16"/>
-            <p:cNvSpPr/>
-            <p:nvPr/>
-          </p:nvSpPr>
-          <p:spPr>
-            <a:xfrm flipH="false" flipV="false" rot="0">
-              <a:off x="0" y="4314679"/>
-              <a:ext cx="5702087" cy="723576"/>
-            </a:xfrm>
-            <a:custGeom>
-              <a:avLst/>
-              <a:gdLst/>
-              <a:ahLst/>
-              <a:cxnLst/>
-              <a:rect r="r" b="b" t="t" l="l"/>
-              <a:pathLst>
-                <a:path h="723576" w="5702087">
-                  <a:moveTo>
-                    <a:pt x="0" y="0"/>
-                  </a:moveTo>
-                  <a:lnTo>
-                    <a:pt x="5702087" y="0"/>
-                  </a:lnTo>
-                  <a:lnTo>
-                    <a:pt x="5702087" y="723576"/>
-                  </a:lnTo>
-                  <a:lnTo>
-                    <a:pt x="0" y="723576"/>
-                  </a:lnTo>
-                  <a:lnTo>
-                    <a:pt x="0" y="0"/>
-                  </a:lnTo>
-                  <a:close/>
-                </a:path>
-              </a:pathLst>
-            </a:custGeom>
-            <a:blipFill>
-              <a:blip r:embed="rId6">
-                <a:alphaModFix amt="17000"/>
-              </a:blip>
-              <a:stretch>
-                <a:fillRect l="-2499" t="-762883" r="0" b="-349482"/>
-              </a:stretch>
-            </a:blipFill>
-          </p:spPr>
         </p:sp>
       </p:grpSp>
     </p:spTree>
@@ -7644,7 +6028,7 @@
 </p:sld>
 </file>
 
-<file path=ppt/slides/slide8.xml><?xml version="1.0" encoding="utf-8"?>
+<file path=ppt/slides/slide6.xml><?xml version="1.0" encoding="utf-8"?>
 <p:sld xmlns:p="http://schemas.openxmlformats.org/presentationml/2006/main" xmlns:a="http://schemas.openxmlformats.org/drawingml/2006/main" xmlns:r="http://schemas.openxmlformats.org/officeDocument/2006/relationships">
   <p:cSld>
     <p:bg>
